--- a/public/manuales/Capacitacion_Supervisor.pptx
+++ b/public/manuales/Capacitacion_Supervisor.pptx
@@ -16,6 +16,8 @@
     <p:sldId id="264" r:id="rId15"/>
     <p:sldId id="265" r:id="rId16"/>
     <p:sldId id="266" r:id="rId17"/>
+    <p:sldId id="267" r:id="rId18"/>
+    <p:sldId id="268" r:id="rId19"/>
   </p:sldIdLst>
   <p:sldSz cx="12191695" cy="6858000" type="screen4x3"/>
   <p:notesSz cx="6858000" cy="9144000"/>
@@ -3364,7 +3366,7 @@
                 </a:solidFill>
                 <a:latin typeface="Calibri"/>
               </a:rPr>
-              <a:t>Condominio Laguna Norte  ·  Junio 2026</a:t>
+              <a:t>Condominio Laguna Norte  ·  Junio 2026  ·  v1.1</a:t>
             </a:r>
           </a:p>
         </p:txBody>
@@ -3469,7 +3471,7 @@
                 </a:solidFill>
                 <a:latin typeface="Calibri"/>
               </a:rPr>
-              <a:t>Datos de Acceso</a:t>
+              <a:t>Crear Nueva SC</a:t>
             </a:r>
           </a:p>
         </p:txBody>
@@ -3509,16 +3511,40 @@
           </a:p>
         </p:txBody>
       </p:sp>
-      <p:sp>
-        <p:nvSpPr>
-          <p:cNvPr id="5" name="TextBox 4"/>
+      <p:pic>
+        <p:nvPicPr>
+          <p:cNvPr id="5" name="Picture 4" descr="11_sc_crear.png"/>
+          <p:cNvPicPr>
+            <a:picLocks noChangeAspect="1"/>
+          </p:cNvPicPr>
+          <p:nvPr/>
+        </p:nvPicPr>
+        <p:blipFill>
+          <a:blip r:embed="rId2"/>
+          <a:stretch>
+            <a:fillRect/>
+          </a:stretch>
+        </p:blipFill>
+        <p:spPr>
+          <a:xfrm>
+            <a:off x="1386687" y="1097280"/>
+            <a:ext cx="9418320" cy="5886450"/>
+          </a:xfrm>
+          <a:prstGeom prst="rect">
+            <a:avLst/>
+          </a:prstGeom>
+        </p:spPr>
+      </p:pic>
+      <p:sp>
+        <p:nvSpPr>
+          <p:cNvPr id="6" name="TextBox 5"/>
           <p:cNvSpPr txBox="1"/>
           <p:nvPr/>
         </p:nvSpPr>
         <p:spPr>
           <a:xfrm>
-            <a:off x="457200" y="1005840"/>
-            <a:ext cx="11247120" cy="731520"/>
+            <a:off x="914400" y="6035040"/>
+            <a:ext cx="10332720" cy="457200"/>
           </a:xfrm>
           <a:prstGeom prst="rect">
             <a:avLst/>
@@ -3526,183 +3552,20 @@
           <a:noFill/>
         </p:spPr>
         <p:txBody>
-          <a:bodyPr wrap="square" anchor="t" lIns="45720" rIns="45720">
+          <a:bodyPr wrap="square" anchor="ctr" lIns="45720" rIns="45720">
             <a:spAutoFit/>
           </a:bodyPr>
           <a:lstStyle/>
           <a:p>
-            <a:pPr algn="l"/>
-            <a:r>
-              <a:rPr sz="1400" b="0">
+            <a:pPr algn="ctr"/>
+            <a:r>
+              <a:rPr sz="1200" b="0">
                 <a:solidFill>
                   <a:srgbClr val="666666"/>
                 </a:solidFill>
                 <a:latin typeface="Calibri"/>
               </a:rPr>
-              <a:t>Credenciales de prueba para capacitación:</a:t>
-            </a:r>
-          </a:p>
-        </p:txBody>
-      </p:sp>
-      <p:sp>
-        <p:nvSpPr>
-          <p:cNvPr id="6" name="TextBox 5"/>
-          <p:cNvSpPr txBox="1"/>
-          <p:nvPr/>
-        </p:nvSpPr>
-        <p:spPr>
-          <a:xfrm>
-            <a:off x="640080" y="1828800"/>
-            <a:ext cx="10972800" cy="4572000"/>
-          </a:xfrm>
-          <a:prstGeom prst="rect">
-            <a:avLst/>
-          </a:prstGeom>
-          <a:noFill/>
-        </p:spPr>
-        <p:txBody>
-          <a:bodyPr wrap="square">
-            <a:spAutoFit/>
-          </a:bodyPr>
-          <a:lstStyle/>
-          <a:p>
-            <a:pPr algn="l">
-              <a:lnSpc>
-                <a:spcPct val="140000"/>
-              </a:lnSpc>
-              <a:spcAft>
-                <a:spcPts val="800"/>
-              </a:spcAft>
-            </a:pPr>
-            <a:r>
-              <a:rPr sz="1600" b="1">
-                <a:solidFill>
-                  <a:srgbClr val="0369A1"/>
-                </a:solidFill>
-                <a:latin typeface="Calibri"/>
-              </a:rPr>
-              <a:t>● </a:t>
-            </a:r>
-            <a:r>
-              <a:rPr sz="1600">
-                <a:solidFill>
-                  <a:srgbClr val="0F2040"/>
-                </a:solidFill>
-                <a:latin typeface="Calibri"/>
-              </a:rPr>
-              <a:t>URL: https://condominios-cyj.vercel.app</a:t>
-            </a:r>
-          </a:p>
-          <a:p>
-            <a:pPr algn="l">
-              <a:lnSpc>
-                <a:spcPct val="140000"/>
-              </a:lnSpc>
-              <a:spcAft>
-                <a:spcPts val="800"/>
-              </a:spcAft>
-            </a:pPr>
-            <a:r>
-              <a:rPr sz="1600" b="1">
-                <a:solidFill>
-                  <a:srgbClr val="0369A1"/>
-                </a:solidFill>
-                <a:latin typeface="Calibri"/>
-              </a:rPr>
-              <a:t>● </a:t>
-            </a:r>
-            <a:r>
-              <a:rPr sz="1600">
-                <a:solidFill>
-                  <a:srgbClr val="0F2040"/>
-                </a:solidFill>
-                <a:latin typeface="Calibri"/>
-              </a:rPr>
-              <a:t>Email: supervisor.test@cyj.cl</a:t>
-            </a:r>
-          </a:p>
-          <a:p>
-            <a:pPr algn="l">
-              <a:lnSpc>
-                <a:spcPct val="140000"/>
-              </a:lnSpc>
-              <a:spcAft>
-                <a:spcPts val="800"/>
-              </a:spcAft>
-            </a:pPr>
-            <a:r>
-              <a:rPr sz="1600" b="1">
-                <a:solidFill>
-                  <a:srgbClr val="0369A1"/>
-                </a:solidFill>
-                <a:latin typeface="Calibri"/>
-              </a:rPr>
-              <a:t>● </a:t>
-            </a:r>
-            <a:r>
-              <a:rPr sz="1600">
-                <a:solidFill>
-                  <a:srgbClr val="0F2040"/>
-                </a:solidFill>
-                <a:latin typeface="Calibri"/>
-              </a:rPr>
-              <a:t>Contraseña temporal: Supervisor2026!</a:t>
-            </a:r>
-          </a:p>
-          <a:p>
-            <a:pPr algn="l">
-              <a:lnSpc>
-                <a:spcPct val="140000"/>
-              </a:lnSpc>
-              <a:spcAft>
-                <a:spcPts val="800"/>
-              </a:spcAft>
-            </a:pPr>
-            <a:r>
-              <a:rPr sz="1600" b="1">
-                <a:solidFill>
-                  <a:srgbClr val="0369A1"/>
-                </a:solidFill>
-                <a:latin typeface="Calibri"/>
-              </a:rPr>
-              <a:t>● </a:t>
-            </a:r>
-            <a:r>
-              <a:rPr sz="1600">
-                <a:solidFill>
-                  <a:srgbClr val="0F2040"/>
-                </a:solidFill>
-                <a:latin typeface="Calibri"/>
-              </a:rPr>
-              <a:t>Deberás cambiar la contraseña en el primer login</a:t>
-            </a:r>
-          </a:p>
-          <a:p>
-            <a:pPr algn="l">
-              <a:lnSpc>
-                <a:spcPct val="140000"/>
-              </a:lnSpc>
-              <a:spcAft>
-                <a:spcPts val="800"/>
-              </a:spcAft>
-            </a:pPr>
-            <a:r>
-              <a:rPr sz="1600" b="1">
-                <a:solidFill>
-                  <a:srgbClr val="0369A1"/>
-                </a:solidFill>
-                <a:latin typeface="Calibri"/>
-              </a:rPr>
-              <a:t>● </a:t>
-            </a:r>
-            <a:r>
-              <a:rPr sz="1600">
-                <a:solidFill>
-                  <a:srgbClr val="0F2040"/>
-                </a:solidFill>
-                <a:latin typeface="Calibri"/>
-              </a:rPr>
-              <a:t>Página de inicio: /sistema (dashboard)</a:t>
+              <a:t>Formulario de creación de Solicitud de Compra</a:t>
             </a:r>
           </a:p>
         </p:txBody>
@@ -3830,6 +3693,890 @@
 </file>
 
 <file path=ppt/slides/slide11.xml><?xml version="1.0" encoding="utf-8"?>
+<p:sld xmlns:a="http://schemas.openxmlformats.org/drawingml/2006/main" xmlns:p="http://schemas.openxmlformats.org/presentationml/2006/main" xmlns:r="http://schemas.openxmlformats.org/officeDocument/2006/relationships">
+  <p:cSld>
+    <p:bg>
+      <p:bgPr>
+        <a:solidFill>
+          <a:srgbClr val="FFFFFF"/>
+        </a:solidFill>
+        <a:effectLst/>
+      </p:bgPr>
+    </p:bg>
+    <p:spTree>
+      <p:nvGrpSpPr>
+        <p:cNvPr id="1" name=""/>
+        <p:cNvGrpSpPr/>
+        <p:nvPr/>
+      </p:nvGrpSpPr>
+      <p:grpSpPr/>
+      <p:sp>
+        <p:nvSpPr>
+          <p:cNvPr id="2" name="Rectangle 1"/>
+          <p:cNvSpPr/>
+          <p:nvPr/>
+        </p:nvSpPr>
+        <p:spPr>
+          <a:xfrm>
+            <a:off x="0" y="0"/>
+            <a:ext cx="12191695" cy="822960"/>
+          </a:xfrm>
+          <a:prstGeom prst="rect">
+            <a:avLst/>
+          </a:prstGeom>
+          <a:solidFill>
+            <a:srgbClr val="0A1172"/>
+          </a:solidFill>
+          <a:ln>
+            <a:noFill/>
+          </a:ln>
+          <a:effectLst/>
+        </p:spPr>
+        <p:style>
+          <a:lnRef idx="1">
+            <a:schemeClr val="accent1"/>
+          </a:lnRef>
+          <a:fillRef idx="3">
+            <a:schemeClr val="accent1"/>
+          </a:fillRef>
+          <a:effectRef idx="2">
+            <a:schemeClr val="accent1"/>
+          </a:effectRef>
+          <a:fontRef idx="minor">
+            <a:schemeClr val="lt1"/>
+          </a:fontRef>
+        </p:style>
+        <p:txBody>
+          <a:bodyPr rtlCol="0" anchor="ctr"/>
+          <a:lstStyle/>
+          <a:p>
+            <a:pPr algn="ctr"/>
+          </a:p>
+        </p:txBody>
+      </p:sp>
+      <p:sp>
+        <p:nvSpPr>
+          <p:cNvPr id="3" name="TextBox 2"/>
+          <p:cNvSpPr txBox="1"/>
+          <p:nvPr/>
+        </p:nvSpPr>
+        <p:spPr>
+          <a:xfrm>
+            <a:off x="365760" y="137160"/>
+            <a:ext cx="10058400" cy="548640"/>
+          </a:xfrm>
+          <a:prstGeom prst="rect">
+            <a:avLst/>
+          </a:prstGeom>
+          <a:noFill/>
+        </p:spPr>
+        <p:txBody>
+          <a:bodyPr wrap="square" anchor="ctr" lIns="45720" rIns="45720">
+            <a:spAutoFit/>
+          </a:bodyPr>
+          <a:lstStyle/>
+          <a:p>
+            <a:pPr algn="l"/>
+            <a:r>
+              <a:rPr sz="2200" b="1">
+                <a:solidFill>
+                  <a:srgbClr val="FFFFFF"/>
+                </a:solidFill>
+                <a:latin typeface="Calibri"/>
+              </a:rPr>
+              <a:t>No puedes hacer</a:t>
+            </a:r>
+          </a:p>
+        </p:txBody>
+      </p:sp>
+      <p:sp>
+        <p:nvSpPr>
+          <p:cNvPr id="4" name="TextBox 3"/>
+          <p:cNvSpPr txBox="1"/>
+          <p:nvPr/>
+        </p:nvSpPr>
+        <p:spPr>
+          <a:xfrm>
+            <a:off x="11247120" y="137160"/>
+            <a:ext cx="731520" cy="548640"/>
+          </a:xfrm>
+          <a:prstGeom prst="rect">
+            <a:avLst/>
+          </a:prstGeom>
+          <a:noFill/>
+        </p:spPr>
+        <p:txBody>
+          <a:bodyPr wrap="square" anchor="ctr" lIns="45720" rIns="45720">
+            <a:spAutoFit/>
+          </a:bodyPr>
+          <a:lstStyle/>
+          <a:p>
+            <a:pPr algn="r"/>
+            <a:r>
+              <a:rPr sz="1400" b="0">
+                <a:solidFill>
+                  <a:srgbClr val="F59E0B"/>
+                </a:solidFill>
+                <a:latin typeface="Calibri"/>
+              </a:rPr>
+              <a:t>11</a:t>
+            </a:r>
+          </a:p>
+        </p:txBody>
+      </p:sp>
+      <p:sp>
+        <p:nvSpPr>
+          <p:cNvPr id="5" name="TextBox 4"/>
+          <p:cNvSpPr txBox="1"/>
+          <p:nvPr/>
+        </p:nvSpPr>
+        <p:spPr>
+          <a:xfrm>
+            <a:off x="457200" y="1005840"/>
+            <a:ext cx="11247120" cy="731520"/>
+          </a:xfrm>
+          <a:prstGeom prst="rect">
+            <a:avLst/>
+          </a:prstGeom>
+          <a:noFill/>
+        </p:spPr>
+        <p:txBody>
+          <a:bodyPr wrap="square" anchor="t" lIns="45720" rIns="45720">
+            <a:spAutoFit/>
+          </a:bodyPr>
+          <a:lstStyle/>
+          <a:p>
+            <a:pPr algn="l"/>
+            <a:r>
+              <a:rPr sz="1400" b="0">
+                <a:solidFill>
+                  <a:srgbClr val="666666"/>
+                </a:solidFill>
+                <a:latin typeface="Calibri"/>
+              </a:rPr>
+              <a:t>Limitaciones del rol Supervisor:</a:t>
+            </a:r>
+          </a:p>
+        </p:txBody>
+      </p:sp>
+      <p:sp>
+        <p:nvSpPr>
+          <p:cNvPr id="6" name="TextBox 5"/>
+          <p:cNvSpPr txBox="1"/>
+          <p:nvPr/>
+        </p:nvSpPr>
+        <p:spPr>
+          <a:xfrm>
+            <a:off x="640080" y="1828800"/>
+            <a:ext cx="10972800" cy="4572000"/>
+          </a:xfrm>
+          <a:prstGeom prst="rect">
+            <a:avLst/>
+          </a:prstGeom>
+          <a:noFill/>
+        </p:spPr>
+        <p:txBody>
+          <a:bodyPr wrap="square">
+            <a:spAutoFit/>
+          </a:bodyPr>
+          <a:lstStyle/>
+          <a:p>
+            <a:pPr algn="l">
+              <a:lnSpc>
+                <a:spcPct val="140000"/>
+              </a:lnSpc>
+              <a:spcAft>
+                <a:spcPts val="800"/>
+              </a:spcAft>
+            </a:pPr>
+            <a:r>
+              <a:rPr sz="1600" b="1">
+                <a:solidFill>
+                  <a:srgbClr val="0369A1"/>
+                </a:solidFill>
+              </a:rPr>
+              <a:t>● </a:t>
+            </a:r>
+            <a:r>
+              <a:rPr sz="1600">
+                <a:solidFill>
+                  <a:srgbClr val="0F2040"/>
+                </a:solidFill>
+              </a:rPr>
+              <a:t>No puedes gestionar Usuarios (solo ver)</a:t>
+            </a:r>
+          </a:p>
+          <a:p>
+            <a:pPr algn="l">
+              <a:lnSpc>
+                <a:spcPct val="140000"/>
+              </a:lnSpc>
+              <a:spcAft>
+                <a:spcPts val="800"/>
+              </a:spcAft>
+            </a:pPr>
+            <a:r>
+              <a:rPr sz="1600" b="1">
+                <a:solidFill>
+                  <a:srgbClr val="0369A1"/>
+                </a:solidFill>
+              </a:rPr>
+              <a:t>● </a:t>
+            </a:r>
+            <a:r>
+              <a:rPr sz="1600">
+                <a:solidFill>
+                  <a:srgbClr val="0F2040"/>
+                </a:solidFill>
+              </a:rPr>
+              <a:t>No puedes eliminar nada</a:t>
+            </a:r>
+          </a:p>
+          <a:p>
+            <a:pPr algn="l">
+              <a:lnSpc>
+                <a:spcPct val="140000"/>
+              </a:lnSpc>
+              <a:spcAft>
+                <a:spcPts val="800"/>
+              </a:spcAft>
+            </a:pPr>
+            <a:r>
+              <a:rPr sz="1600" b="1">
+                <a:solidFill>
+                  <a:srgbClr val="0369A1"/>
+                </a:solidFill>
+              </a:rPr>
+              <a:t>● </a:t>
+            </a:r>
+            <a:r>
+              <a:rPr sz="1600">
+                <a:solidFill>
+                  <a:srgbClr val="0F2040"/>
+                </a:solidFill>
+              </a:rPr>
+              <a:t>No puedes crear proyectos (solo editar existentes)</a:t>
+            </a:r>
+          </a:p>
+          <a:p>
+            <a:pPr algn="l">
+              <a:lnSpc>
+                <a:spcPct val="140000"/>
+              </a:lnSpc>
+              <a:spcAft>
+                <a:spcPts val="800"/>
+              </a:spcAft>
+            </a:pPr>
+            <a:r>
+              <a:rPr sz="1600" b="1">
+                <a:solidFill>
+                  <a:srgbClr val="0369A1"/>
+                </a:solidFill>
+              </a:rPr>
+              <a:t>● </a:t>
+            </a:r>
+            <a:r>
+              <a:rPr sz="1600">
+                <a:solidFill>
+                  <a:srgbClr val="0F2040"/>
+                </a:solidFill>
+              </a:rPr>
+              <a:t>No puedes gestionar Respaldos de BD</a:t>
+            </a:r>
+          </a:p>
+          <a:p>
+            <a:pPr algn="l">
+              <a:lnSpc>
+                <a:spcPct val="140000"/>
+              </a:lnSpc>
+              <a:spcAft>
+                <a:spcPts val="800"/>
+              </a:spcAft>
+            </a:pPr>
+            <a:r>
+              <a:rPr sz="1600" b="1">
+                <a:solidFill>
+                  <a:srgbClr val="0369A1"/>
+                </a:solidFill>
+              </a:rPr>
+              <a:t>● </a:t>
+            </a:r>
+            <a:r>
+              <a:rPr sz="1600">
+                <a:solidFill>
+                  <a:srgbClr val="0F2040"/>
+                </a:solidFill>
+              </a:rPr>
+              <a:t>No puedes ver Cumplimiento Legal ni Auditoría</a:t>
+            </a:r>
+          </a:p>
+          <a:p>
+            <a:pPr algn="l">
+              <a:lnSpc>
+                <a:spcPct val="140000"/>
+              </a:lnSpc>
+              <a:spcAft>
+                <a:spcPts val="800"/>
+              </a:spcAft>
+            </a:pPr>
+            <a:r>
+              <a:rPr sz="1600" b="1">
+                <a:solidFill>
+                  <a:srgbClr val="0369A1"/>
+                </a:solidFill>
+              </a:rPr>
+              <a:t>● </a:t>
+            </a:r>
+            <a:r>
+              <a:rPr sz="1600">
+                <a:solidFill>
+                  <a:srgbClr val="0F2040"/>
+                </a:solidFill>
+              </a:rPr>
+              <a:t>No puedes aprobar SC en etapa 2 (eso lo hace el admin)</a:t>
+            </a:r>
+          </a:p>
+        </p:txBody>
+      </p:sp>
+      <p:sp>
+        <p:nvSpPr>
+          <p:cNvPr id="7" name="Rectangle 6"/>
+          <p:cNvSpPr/>
+          <p:nvPr/>
+        </p:nvSpPr>
+        <p:spPr>
+          <a:xfrm>
+            <a:off x="0" y="6583680"/>
+            <a:ext cx="12191695" cy="274320"/>
+          </a:xfrm>
+          <a:prstGeom prst="rect">
+            <a:avLst/>
+          </a:prstGeom>
+          <a:solidFill>
+            <a:srgbClr val="0F2040"/>
+          </a:solidFill>
+          <a:ln>
+            <a:noFill/>
+          </a:ln>
+          <a:effectLst/>
+        </p:spPr>
+        <p:style>
+          <a:lnRef idx="1">
+            <a:schemeClr val="accent1"/>
+          </a:lnRef>
+          <a:fillRef idx="3">
+            <a:schemeClr val="accent1"/>
+          </a:fillRef>
+          <a:effectRef idx="2">
+            <a:schemeClr val="accent1"/>
+          </a:effectRef>
+          <a:fontRef idx="minor">
+            <a:schemeClr val="lt1"/>
+          </a:fontRef>
+        </p:style>
+        <p:txBody>
+          <a:bodyPr rtlCol="0" anchor="ctr"/>
+          <a:lstStyle/>
+          <a:p>
+            <a:pPr algn="ctr"/>
+          </a:p>
+        </p:txBody>
+      </p:sp>
+      <p:sp>
+        <p:nvSpPr>
+          <p:cNvPr id="8" name="TextBox 7"/>
+          <p:cNvSpPr txBox="1"/>
+          <p:nvPr/>
+        </p:nvSpPr>
+        <p:spPr>
+          <a:xfrm>
+            <a:off x="365760" y="6583680"/>
+            <a:ext cx="6400800" cy="274320"/>
+          </a:xfrm>
+          <a:prstGeom prst="rect">
+            <a:avLst/>
+          </a:prstGeom>
+          <a:noFill/>
+        </p:spPr>
+        <p:txBody>
+          <a:bodyPr wrap="square" anchor="ctr" lIns="45720" rIns="45720">
+            <a:spAutoFit/>
+          </a:bodyPr>
+          <a:lstStyle/>
+          <a:p>
+            <a:pPr algn="l"/>
+            <a:r>
+              <a:rPr sz="900" b="0">
+                <a:solidFill>
+                  <a:srgbClr val="FFFFFF"/>
+                </a:solidFill>
+                <a:latin typeface="Calibri"/>
+              </a:rPr>
+              <a:t>Asesorías Integrales CyJ · Capacitación Supervisor</a:t>
+            </a:r>
+          </a:p>
+        </p:txBody>
+      </p:sp>
+      <p:sp>
+        <p:nvSpPr>
+          <p:cNvPr id="9" name="TextBox 8"/>
+          <p:cNvSpPr txBox="1"/>
+          <p:nvPr/>
+        </p:nvSpPr>
+        <p:spPr>
+          <a:xfrm>
+            <a:off x="7315200" y="6583680"/>
+            <a:ext cx="4572000" cy="274320"/>
+          </a:xfrm>
+          <a:prstGeom prst="rect">
+            <a:avLst/>
+          </a:prstGeom>
+          <a:noFill/>
+        </p:spPr>
+        <p:txBody>
+          <a:bodyPr wrap="square" anchor="ctr" lIns="45720" rIns="45720">
+            <a:spAutoFit/>
+          </a:bodyPr>
+          <a:lstStyle/>
+          <a:p>
+            <a:pPr algn="r"/>
+            <a:r>
+              <a:rPr sz="900" b="0">
+                <a:solidFill>
+                  <a:srgbClr val="F59E0B"/>
+                </a:solidFill>
+                <a:latin typeface="Calibri"/>
+              </a:rPr>
+              <a:t>https://condominios-cyj.vercel.app</a:t>
+            </a:r>
+          </a:p>
+        </p:txBody>
+      </p:sp>
+    </p:spTree>
+  </p:cSld>
+  <p:clrMapOvr>
+    <a:masterClrMapping/>
+  </p:clrMapOvr>
+</p:sld>
+</file>
+
+<file path=ppt/slides/slide12.xml><?xml version="1.0" encoding="utf-8"?>
+<p:sld xmlns:a="http://schemas.openxmlformats.org/drawingml/2006/main" xmlns:p="http://schemas.openxmlformats.org/presentationml/2006/main" xmlns:r="http://schemas.openxmlformats.org/officeDocument/2006/relationships">
+  <p:cSld>
+    <p:bg>
+      <p:bgPr>
+        <a:solidFill>
+          <a:srgbClr val="FFFFFF"/>
+        </a:solidFill>
+        <a:effectLst/>
+      </p:bgPr>
+    </p:bg>
+    <p:spTree>
+      <p:nvGrpSpPr>
+        <p:cNvPr id="1" name=""/>
+        <p:cNvGrpSpPr/>
+        <p:nvPr/>
+      </p:nvGrpSpPr>
+      <p:grpSpPr/>
+      <p:sp>
+        <p:nvSpPr>
+          <p:cNvPr id="2" name="Rectangle 1"/>
+          <p:cNvSpPr/>
+          <p:nvPr/>
+        </p:nvSpPr>
+        <p:spPr>
+          <a:xfrm>
+            <a:off x="0" y="0"/>
+            <a:ext cx="12191695" cy="822960"/>
+          </a:xfrm>
+          <a:prstGeom prst="rect">
+            <a:avLst/>
+          </a:prstGeom>
+          <a:solidFill>
+            <a:srgbClr val="0A1172"/>
+          </a:solidFill>
+          <a:ln>
+            <a:noFill/>
+          </a:ln>
+          <a:effectLst/>
+        </p:spPr>
+        <p:style>
+          <a:lnRef idx="1">
+            <a:schemeClr val="accent1"/>
+          </a:lnRef>
+          <a:fillRef idx="3">
+            <a:schemeClr val="accent1"/>
+          </a:fillRef>
+          <a:effectRef idx="2">
+            <a:schemeClr val="accent1"/>
+          </a:effectRef>
+          <a:fontRef idx="minor">
+            <a:schemeClr val="lt1"/>
+          </a:fontRef>
+        </p:style>
+        <p:txBody>
+          <a:bodyPr rtlCol="0" anchor="ctr"/>
+          <a:lstStyle/>
+          <a:p>
+            <a:pPr algn="ctr"/>
+          </a:p>
+        </p:txBody>
+      </p:sp>
+      <p:sp>
+        <p:nvSpPr>
+          <p:cNvPr id="3" name="TextBox 2"/>
+          <p:cNvSpPr txBox="1"/>
+          <p:nvPr/>
+        </p:nvSpPr>
+        <p:spPr>
+          <a:xfrm>
+            <a:off x="365760" y="137160"/>
+            <a:ext cx="10058400" cy="548640"/>
+          </a:xfrm>
+          <a:prstGeom prst="rect">
+            <a:avLst/>
+          </a:prstGeom>
+          <a:noFill/>
+        </p:spPr>
+        <p:txBody>
+          <a:bodyPr wrap="square" anchor="ctr" lIns="45720" rIns="45720">
+            <a:spAutoFit/>
+          </a:bodyPr>
+          <a:lstStyle/>
+          <a:p>
+            <a:pPr algn="l"/>
+            <a:r>
+              <a:rPr sz="2200" b="1">
+                <a:solidFill>
+                  <a:srgbClr val="FFFFFF"/>
+                </a:solidFill>
+                <a:latin typeface="Calibri"/>
+              </a:rPr>
+              <a:t>Datos de Acceso</a:t>
+            </a:r>
+          </a:p>
+        </p:txBody>
+      </p:sp>
+      <p:sp>
+        <p:nvSpPr>
+          <p:cNvPr id="4" name="TextBox 3"/>
+          <p:cNvSpPr txBox="1"/>
+          <p:nvPr/>
+        </p:nvSpPr>
+        <p:spPr>
+          <a:xfrm>
+            <a:off x="11247120" y="137160"/>
+            <a:ext cx="731520" cy="548640"/>
+          </a:xfrm>
+          <a:prstGeom prst="rect">
+            <a:avLst/>
+          </a:prstGeom>
+          <a:noFill/>
+        </p:spPr>
+        <p:txBody>
+          <a:bodyPr wrap="square" anchor="ctr" lIns="45720" rIns="45720">
+            <a:spAutoFit/>
+          </a:bodyPr>
+          <a:lstStyle/>
+          <a:p>
+            <a:pPr algn="r"/>
+            <a:r>
+              <a:rPr sz="1400" b="0">
+                <a:solidFill>
+                  <a:srgbClr val="F59E0B"/>
+                </a:solidFill>
+                <a:latin typeface="Calibri"/>
+              </a:rPr>
+              <a:t>12</a:t>
+            </a:r>
+          </a:p>
+        </p:txBody>
+      </p:sp>
+      <p:sp>
+        <p:nvSpPr>
+          <p:cNvPr id="5" name="TextBox 4"/>
+          <p:cNvSpPr txBox="1"/>
+          <p:nvPr/>
+        </p:nvSpPr>
+        <p:spPr>
+          <a:xfrm>
+            <a:off x="457200" y="1005840"/>
+            <a:ext cx="11247120" cy="731520"/>
+          </a:xfrm>
+          <a:prstGeom prst="rect">
+            <a:avLst/>
+          </a:prstGeom>
+          <a:noFill/>
+        </p:spPr>
+        <p:txBody>
+          <a:bodyPr wrap="square" anchor="t" lIns="45720" rIns="45720">
+            <a:spAutoFit/>
+          </a:bodyPr>
+          <a:lstStyle/>
+          <a:p>
+            <a:pPr algn="l"/>
+            <a:r>
+              <a:rPr sz="1400" b="0">
+                <a:solidFill>
+                  <a:srgbClr val="666666"/>
+                </a:solidFill>
+                <a:latin typeface="Calibri"/>
+              </a:rPr>
+              <a:t>Credenciales de prueba:</a:t>
+            </a:r>
+          </a:p>
+        </p:txBody>
+      </p:sp>
+      <p:sp>
+        <p:nvSpPr>
+          <p:cNvPr id="6" name="TextBox 5"/>
+          <p:cNvSpPr txBox="1"/>
+          <p:nvPr/>
+        </p:nvSpPr>
+        <p:spPr>
+          <a:xfrm>
+            <a:off x="640080" y="1828800"/>
+            <a:ext cx="10972800" cy="4572000"/>
+          </a:xfrm>
+          <a:prstGeom prst="rect">
+            <a:avLst/>
+          </a:prstGeom>
+          <a:noFill/>
+        </p:spPr>
+        <p:txBody>
+          <a:bodyPr wrap="square">
+            <a:spAutoFit/>
+          </a:bodyPr>
+          <a:lstStyle/>
+          <a:p>
+            <a:pPr algn="l">
+              <a:lnSpc>
+                <a:spcPct val="140000"/>
+              </a:lnSpc>
+              <a:spcAft>
+                <a:spcPts val="800"/>
+              </a:spcAft>
+            </a:pPr>
+            <a:r>
+              <a:rPr sz="1600" b="1">
+                <a:solidFill>
+                  <a:srgbClr val="0369A1"/>
+                </a:solidFill>
+              </a:rPr>
+              <a:t>● </a:t>
+            </a:r>
+            <a:r>
+              <a:rPr sz="1600">
+                <a:solidFill>
+                  <a:srgbClr val="0F2040"/>
+                </a:solidFill>
+              </a:rPr>
+              <a:t>URL: https://condominios-cyj.vercel.app</a:t>
+            </a:r>
+          </a:p>
+          <a:p>
+            <a:pPr algn="l">
+              <a:lnSpc>
+                <a:spcPct val="140000"/>
+              </a:lnSpc>
+              <a:spcAft>
+                <a:spcPts val="800"/>
+              </a:spcAft>
+            </a:pPr>
+            <a:r>
+              <a:rPr sz="1600" b="1">
+                <a:solidFill>
+                  <a:srgbClr val="0369A1"/>
+                </a:solidFill>
+              </a:rPr>
+              <a:t>● </a:t>
+            </a:r>
+            <a:r>
+              <a:rPr sz="1600">
+                <a:solidFill>
+                  <a:srgbClr val="0F2040"/>
+                </a:solidFill>
+              </a:rPr>
+              <a:t>Email: supervisor.test@cyj.cl</a:t>
+            </a:r>
+          </a:p>
+          <a:p>
+            <a:pPr algn="l">
+              <a:lnSpc>
+                <a:spcPct val="140000"/>
+              </a:lnSpc>
+              <a:spcAft>
+                <a:spcPts val="800"/>
+              </a:spcAft>
+            </a:pPr>
+            <a:r>
+              <a:rPr sz="1600" b="1">
+                <a:solidFill>
+                  <a:srgbClr val="0369A1"/>
+                </a:solidFill>
+              </a:rPr>
+              <a:t>● </a:t>
+            </a:r>
+            <a:r>
+              <a:rPr sz="1600">
+                <a:solidFill>
+                  <a:srgbClr val="0F2040"/>
+                </a:solidFill>
+              </a:rPr>
+              <a:t>Contraseña temporal: Supervisor2026!</a:t>
+            </a:r>
+          </a:p>
+          <a:p>
+            <a:pPr algn="l">
+              <a:lnSpc>
+                <a:spcPct val="140000"/>
+              </a:lnSpc>
+              <a:spcAft>
+                <a:spcPts val="800"/>
+              </a:spcAft>
+            </a:pPr>
+            <a:r>
+              <a:rPr sz="1600" b="1">
+                <a:solidFill>
+                  <a:srgbClr val="0369A1"/>
+                </a:solidFill>
+              </a:rPr>
+              <a:t>● </a:t>
+            </a:r>
+            <a:r>
+              <a:rPr sz="1600">
+                <a:solidFill>
+                  <a:srgbClr val="0F2040"/>
+                </a:solidFill>
+              </a:rPr>
+              <a:t>Deberás cambiar la contraseña en el primer login</a:t>
+            </a:r>
+          </a:p>
+        </p:txBody>
+      </p:sp>
+      <p:sp>
+        <p:nvSpPr>
+          <p:cNvPr id="7" name="Rectangle 6"/>
+          <p:cNvSpPr/>
+          <p:nvPr/>
+        </p:nvSpPr>
+        <p:spPr>
+          <a:xfrm>
+            <a:off x="0" y="6583680"/>
+            <a:ext cx="12191695" cy="274320"/>
+          </a:xfrm>
+          <a:prstGeom prst="rect">
+            <a:avLst/>
+          </a:prstGeom>
+          <a:solidFill>
+            <a:srgbClr val="0F2040"/>
+          </a:solidFill>
+          <a:ln>
+            <a:noFill/>
+          </a:ln>
+          <a:effectLst/>
+        </p:spPr>
+        <p:style>
+          <a:lnRef idx="1">
+            <a:schemeClr val="accent1"/>
+          </a:lnRef>
+          <a:fillRef idx="3">
+            <a:schemeClr val="accent1"/>
+          </a:fillRef>
+          <a:effectRef idx="2">
+            <a:schemeClr val="accent1"/>
+          </a:effectRef>
+          <a:fontRef idx="minor">
+            <a:schemeClr val="lt1"/>
+          </a:fontRef>
+        </p:style>
+        <p:txBody>
+          <a:bodyPr rtlCol="0" anchor="ctr"/>
+          <a:lstStyle/>
+          <a:p>
+            <a:pPr algn="ctr"/>
+          </a:p>
+        </p:txBody>
+      </p:sp>
+      <p:sp>
+        <p:nvSpPr>
+          <p:cNvPr id="8" name="TextBox 7"/>
+          <p:cNvSpPr txBox="1"/>
+          <p:nvPr/>
+        </p:nvSpPr>
+        <p:spPr>
+          <a:xfrm>
+            <a:off x="365760" y="6583680"/>
+            <a:ext cx="6400800" cy="274320"/>
+          </a:xfrm>
+          <a:prstGeom prst="rect">
+            <a:avLst/>
+          </a:prstGeom>
+          <a:noFill/>
+        </p:spPr>
+        <p:txBody>
+          <a:bodyPr wrap="square" anchor="ctr" lIns="45720" rIns="45720">
+            <a:spAutoFit/>
+          </a:bodyPr>
+          <a:lstStyle/>
+          <a:p>
+            <a:pPr algn="l"/>
+            <a:r>
+              <a:rPr sz="900" b="0">
+                <a:solidFill>
+                  <a:srgbClr val="FFFFFF"/>
+                </a:solidFill>
+                <a:latin typeface="Calibri"/>
+              </a:rPr>
+              <a:t>Asesorías Integrales CyJ · Capacitación Supervisor</a:t>
+            </a:r>
+          </a:p>
+        </p:txBody>
+      </p:sp>
+      <p:sp>
+        <p:nvSpPr>
+          <p:cNvPr id="9" name="TextBox 8"/>
+          <p:cNvSpPr txBox="1"/>
+          <p:nvPr/>
+        </p:nvSpPr>
+        <p:spPr>
+          <a:xfrm>
+            <a:off x="7315200" y="6583680"/>
+            <a:ext cx="4572000" cy="274320"/>
+          </a:xfrm>
+          <a:prstGeom prst="rect">
+            <a:avLst/>
+          </a:prstGeom>
+          <a:noFill/>
+        </p:spPr>
+        <p:txBody>
+          <a:bodyPr wrap="square" anchor="ctr" lIns="45720" rIns="45720">
+            <a:spAutoFit/>
+          </a:bodyPr>
+          <a:lstStyle/>
+          <a:p>
+            <a:pPr algn="r"/>
+            <a:r>
+              <a:rPr sz="900" b="0">
+                <a:solidFill>
+                  <a:srgbClr val="F59E0B"/>
+                </a:solidFill>
+                <a:latin typeface="Calibri"/>
+              </a:rPr>
+              <a:t>https://condominios-cyj.vercel.app</a:t>
+            </a:r>
+          </a:p>
+        </p:txBody>
+      </p:sp>
+    </p:spTree>
+  </p:cSld>
+  <p:clrMapOvr>
+    <a:masterClrMapping/>
+  </p:clrMapOvr>
+</p:sld>
+</file>
+
+<file path=ppt/slides/slide13.xml><?xml version="1.0" encoding="utf-8"?>
 <p:sld xmlns:a="http://schemas.openxmlformats.org/drawingml/2006/main" xmlns:p="http://schemas.openxmlformats.org/presentationml/2006/main" xmlns:r="http://schemas.openxmlformats.org/officeDocument/2006/relationships">
   <p:cSld>
     <p:bg>
@@ -4201,7 +4948,7 @@
                 </a:solidFill>
                 <a:latin typeface="Calibri"/>
               </a:rPr>
-              <a:t>Como Supervisor tienes acceso a la gestión operativa. Eres el puente entre el personal y el administrador.</a:t>
+              <a:t>Como Supervisor eres el puente entre el personal y el administrador.</a:t>
             </a:r>
           </a:p>
         </p:txBody>
@@ -4241,7 +4988,6 @@
                 <a:solidFill>
                   <a:srgbClr val="0369A1"/>
                 </a:solidFill>
-                <a:latin typeface="Calibri"/>
               </a:rPr>
               <a:t>● </a:t>
             </a:r>
@@ -4250,7 +4996,6 @@
                 <a:solidFill>
                   <a:srgbClr val="0F2040"/>
                 </a:solidFill>
-                <a:latin typeface="Calibri"/>
               </a:rPr>
               <a:t>Crear y editar Órdenes de Trabajo</a:t>
             </a:r>
@@ -4269,7 +5014,6 @@
                 <a:solidFill>
                   <a:srgbClr val="0369A1"/>
                 </a:solidFill>
-                <a:latin typeface="Calibri"/>
               </a:rPr>
               <a:t>● </a:t>
             </a:r>
@@ -4278,7 +5022,6 @@
                 <a:solidFill>
                   <a:srgbClr val="0F2040"/>
                 </a:solidFill>
-                <a:latin typeface="Calibri"/>
               </a:rPr>
               <a:t>Aprobar OT completadas (junto con el admin)</a:t>
             </a:r>
@@ -4297,7 +5040,6 @@
                 <a:solidFill>
                   <a:srgbClr val="0369A1"/>
                 </a:solidFill>
-                <a:latin typeface="Calibri"/>
               </a:rPr>
               <a:t>● </a:t>
             </a:r>
@@ -4306,7 +5048,6 @@
                 <a:solidFill>
                   <a:srgbClr val="0F2040"/>
                 </a:solidFill>
-                <a:latin typeface="Calibri"/>
               </a:rPr>
               <a:t>Aprobar/rechazar Solicitudes de Compra en la 1ra etapa</a:t>
             </a:r>
@@ -4325,7 +5066,6 @@
                 <a:solidFill>
                   <a:srgbClr val="0369A1"/>
                 </a:solidFill>
-                <a:latin typeface="Calibri"/>
               </a:rPr>
               <a:t>● </a:t>
             </a:r>
@@ -4334,7 +5074,6 @@
                 <a:solidFill>
                   <a:srgbClr val="0F2040"/>
                 </a:solidFill>
-                <a:latin typeface="Calibri"/>
               </a:rPr>
               <a:t>Gestionar personal (ver y editar)</a:t>
             </a:r>
@@ -4353,7 +5092,6 @@
                 <a:solidFill>
                   <a:srgbClr val="0369A1"/>
                 </a:solidFill>
-                <a:latin typeface="Calibri"/>
               </a:rPr>
               <a:t>● </a:t>
             </a:r>
@@ -4362,7 +5100,6 @@
                 <a:solidFill>
                   <a:srgbClr val="0F2040"/>
                 </a:solidFill>
-                <a:latin typeface="Calibri"/>
               </a:rPr>
               <a:t>Editar proyectos (no crear)</a:t>
             </a:r>
@@ -4381,7 +5118,6 @@
                 <a:solidFill>
                   <a:srgbClr val="0369A1"/>
                 </a:solidFill>
-                <a:latin typeface="Calibri"/>
               </a:rPr>
               <a:t>● </a:t>
             </a:r>
@@ -4390,7 +5126,6 @@
                 <a:solidFill>
                   <a:srgbClr val="0F2040"/>
                 </a:solidFill>
-                <a:latin typeface="Calibri"/>
               </a:rPr>
               <a:t>Registrar rondas escaneando QR</a:t>
             </a:r>
@@ -4409,7 +5144,6 @@
                 <a:solidFill>
                   <a:srgbClr val="0369A1"/>
                 </a:solidFill>
-                <a:latin typeface="Calibri"/>
               </a:rPr>
               <a:t>● </a:t>
             </a:r>
@@ -4418,37 +5152,8 @@
                 <a:solidFill>
                   <a:srgbClr val="0F2040"/>
                 </a:solidFill>
-                <a:latin typeface="Calibri"/>
               </a:rPr>
               <a:t>Ver y exportar reportes</a:t>
-            </a:r>
-          </a:p>
-          <a:p>
-            <a:pPr algn="l">
-              <a:lnSpc>
-                <a:spcPct val="140000"/>
-              </a:lnSpc>
-              <a:spcAft>
-                <a:spcPts val="800"/>
-              </a:spcAft>
-            </a:pPr>
-            <a:r>
-              <a:rPr sz="1600" b="1">
-                <a:solidFill>
-                  <a:srgbClr val="0369A1"/>
-                </a:solidFill>
-                <a:latin typeface="Calibri"/>
-              </a:rPr>
-              <a:t>● </a:t>
-            </a:r>
-            <a:r>
-              <a:rPr sz="1600">
-                <a:solidFill>
-                  <a:srgbClr val="0F2040"/>
-                </a:solidFill>
-                <a:latin typeface="Calibri"/>
-              </a:rPr>
-              <a:t>Coordinar inspecciones</a:t>
             </a:r>
           </a:p>
         </p:txBody>
@@ -4667,7 +5372,7 @@
                 </a:solidFill>
                 <a:latin typeface="Calibri"/>
               </a:rPr>
-              <a:t>Módulos que puedes ver</a:t>
+              <a:t>Dashboard del Supervisor</a:t>
             </a:r>
           </a:p>
         </p:txBody>
@@ -4707,16 +5412,40 @@
           </a:p>
         </p:txBody>
       </p:sp>
-      <p:sp>
-        <p:nvSpPr>
-          <p:cNvPr id="5" name="TextBox 4"/>
+      <p:pic>
+        <p:nvPicPr>
+          <p:cNvPr id="5" name="Picture 4" descr="02_dashboard.png"/>
+          <p:cNvPicPr>
+            <a:picLocks noChangeAspect="1"/>
+          </p:cNvPicPr>
+          <p:nvPr/>
+        </p:nvPicPr>
+        <p:blipFill>
+          <a:blip r:embed="rId2"/>
+          <a:stretch>
+            <a:fillRect/>
+          </a:stretch>
+        </p:blipFill>
+        <p:spPr>
+          <a:xfrm>
+            <a:off x="1386687" y="1097280"/>
+            <a:ext cx="9418320" cy="5886450"/>
+          </a:xfrm>
+          <a:prstGeom prst="rect">
+            <a:avLst/>
+          </a:prstGeom>
+        </p:spPr>
+      </p:pic>
+      <p:sp>
+        <p:nvSpPr>
+          <p:cNvPr id="6" name="TextBox 5"/>
           <p:cNvSpPr txBox="1"/>
           <p:nvPr/>
         </p:nvSpPr>
         <p:spPr>
           <a:xfrm>
-            <a:off x="457200" y="1005840"/>
-            <a:ext cx="11247120" cy="731520"/>
+            <a:off x="914400" y="6035040"/>
+            <a:ext cx="10332720" cy="457200"/>
           </a:xfrm>
           <a:prstGeom prst="rect">
             <a:avLst/>
@@ -4724,407 +5453,20 @@
           <a:noFill/>
         </p:spPr>
         <p:txBody>
-          <a:bodyPr wrap="square" anchor="t" lIns="45720" rIns="45720">
+          <a:bodyPr wrap="square" anchor="ctr" lIns="45720" rIns="45720">
             <a:spAutoFit/>
           </a:bodyPr>
           <a:lstStyle/>
           <a:p>
-            <a:pPr algn="l"/>
-            <a:r>
-              <a:rPr sz="1400" b="0">
+            <a:pPr algn="ctr"/>
+            <a:r>
+              <a:rPr sz="1200" b="0">
                 <a:solidFill>
                   <a:srgbClr val="666666"/>
                 </a:solidFill>
                 <a:latin typeface="Calibri"/>
               </a:rPr>
-              <a:t>Tienes acceso a la mayoría de módulos operativos:</a:t>
-            </a:r>
-          </a:p>
-        </p:txBody>
-      </p:sp>
-      <p:sp>
-        <p:nvSpPr>
-          <p:cNvPr id="6" name="TextBox 5"/>
-          <p:cNvSpPr txBox="1"/>
-          <p:nvPr/>
-        </p:nvSpPr>
-        <p:spPr>
-          <a:xfrm>
-            <a:off x="640080" y="1828800"/>
-            <a:ext cx="10972800" cy="4572000"/>
-          </a:xfrm>
-          <a:prstGeom prst="rect">
-            <a:avLst/>
-          </a:prstGeom>
-          <a:noFill/>
-        </p:spPr>
-        <p:txBody>
-          <a:bodyPr wrap="square">
-            <a:spAutoFit/>
-          </a:bodyPr>
-          <a:lstStyle/>
-          <a:p>
-            <a:pPr algn="l">
-              <a:lnSpc>
-                <a:spcPct val="140000"/>
-              </a:lnSpc>
-              <a:spcAft>
-                <a:spcPts val="800"/>
-              </a:spcAft>
-            </a:pPr>
-            <a:r>
-              <a:rPr sz="1600" b="1">
-                <a:solidFill>
-                  <a:srgbClr val="0369A1"/>
-                </a:solidFill>
-                <a:latin typeface="Calibri"/>
-              </a:rPr>
-              <a:t>● </a:t>
-            </a:r>
-            <a:r>
-              <a:rPr sz="1600">
-                <a:solidFill>
-                  <a:srgbClr val="0F2040"/>
-                </a:solidFill>
-                <a:latin typeface="Calibri"/>
-              </a:rPr>
-              <a:t>Dashboard</a:t>
-            </a:r>
-          </a:p>
-          <a:p>
-            <a:pPr algn="l">
-              <a:lnSpc>
-                <a:spcPct val="140000"/>
-              </a:lnSpc>
-              <a:spcAft>
-                <a:spcPts val="800"/>
-              </a:spcAft>
-            </a:pPr>
-            <a:r>
-              <a:rPr sz="1600" b="1">
-                <a:solidFill>
-                  <a:srgbClr val="0369A1"/>
-                </a:solidFill>
-                <a:latin typeface="Calibri"/>
-              </a:rPr>
-              <a:t>● </a:t>
-            </a:r>
-            <a:r>
-              <a:rPr sz="1600">
-                <a:solidFill>
-                  <a:srgbClr val="0F2040"/>
-                </a:solidFill>
-                <a:latin typeface="Calibri"/>
-              </a:rPr>
-              <a:t>Órdenes de Trabajo + Aprobaciones OT</a:t>
-            </a:r>
-          </a:p>
-          <a:p>
-            <a:pPr algn="l">
-              <a:lnSpc>
-                <a:spcPct val="140000"/>
-              </a:lnSpc>
-              <a:spcAft>
-                <a:spcPts val="800"/>
-              </a:spcAft>
-            </a:pPr>
-            <a:r>
-              <a:rPr sz="1600" b="1">
-                <a:solidFill>
-                  <a:srgbClr val="0369A1"/>
-                </a:solidFill>
-                <a:latin typeface="Calibri"/>
-              </a:rPr>
-              <a:t>● </a:t>
-            </a:r>
-            <a:r>
-              <a:rPr sz="1600">
-                <a:solidFill>
-                  <a:srgbClr val="0F2040"/>
-                </a:solidFill>
-                <a:latin typeface="Calibri"/>
-              </a:rPr>
-              <a:t>Proyectos (ver y editar)</a:t>
-            </a:r>
-          </a:p>
-          <a:p>
-            <a:pPr algn="l">
-              <a:lnSpc>
-                <a:spcPct val="140000"/>
-              </a:lnSpc>
-              <a:spcAft>
-                <a:spcPts val="800"/>
-              </a:spcAft>
-            </a:pPr>
-            <a:r>
-              <a:rPr sz="1600" b="1">
-                <a:solidFill>
-                  <a:srgbClr val="0369A1"/>
-                </a:solidFill>
-                <a:latin typeface="Calibri"/>
-              </a:rPr>
-              <a:t>● </a:t>
-            </a:r>
-            <a:r>
-              <a:rPr sz="1600">
-                <a:solidFill>
-                  <a:srgbClr val="0F2040"/>
-                </a:solidFill>
-                <a:latin typeface="Calibri"/>
-              </a:rPr>
-              <a:t>Inspecciones (ver, crear, editar)</a:t>
-            </a:r>
-          </a:p>
-          <a:p>
-            <a:pPr algn="l">
-              <a:lnSpc>
-                <a:spcPct val="140000"/>
-              </a:lnSpc>
-              <a:spcAft>
-                <a:spcPts val="800"/>
-              </a:spcAft>
-            </a:pPr>
-            <a:r>
-              <a:rPr sz="1600" b="1">
-                <a:solidFill>
-                  <a:srgbClr val="0369A1"/>
-                </a:solidFill>
-                <a:latin typeface="Calibri"/>
-              </a:rPr>
-              <a:t>● </a:t>
-            </a:r>
-            <a:r>
-              <a:rPr sz="1600">
-                <a:solidFill>
-                  <a:srgbClr val="0F2040"/>
-                </a:solidFill>
-                <a:latin typeface="Calibri"/>
-              </a:rPr>
-              <a:t>Personal (ver y editar)</a:t>
-            </a:r>
-          </a:p>
-          <a:p>
-            <a:pPr algn="l">
-              <a:lnSpc>
-                <a:spcPct val="140000"/>
-              </a:lnSpc>
-              <a:spcAft>
-                <a:spcPts val="800"/>
-              </a:spcAft>
-            </a:pPr>
-            <a:r>
-              <a:rPr sz="1600" b="1">
-                <a:solidFill>
-                  <a:srgbClr val="0369A1"/>
-                </a:solidFill>
-                <a:latin typeface="Calibri"/>
-              </a:rPr>
-              <a:t>● </a:t>
-            </a:r>
-            <a:r>
-              <a:rPr sz="1600">
-                <a:solidFill>
-                  <a:srgbClr val="0F2040"/>
-                </a:solidFill>
-                <a:latin typeface="Calibri"/>
-              </a:rPr>
-              <a:t>Asistencia, Activos</a:t>
-            </a:r>
-          </a:p>
-          <a:p>
-            <a:pPr algn="l">
-              <a:lnSpc>
-                <a:spcPct val="140000"/>
-              </a:lnSpc>
-              <a:spcAft>
-                <a:spcPts val="800"/>
-              </a:spcAft>
-            </a:pPr>
-            <a:r>
-              <a:rPr sz="1600" b="1">
-                <a:solidFill>
-                  <a:srgbClr val="0369A1"/>
-                </a:solidFill>
-                <a:latin typeface="Calibri"/>
-              </a:rPr>
-              <a:t>● </a:t>
-            </a:r>
-            <a:r>
-              <a:rPr sz="1600">
-                <a:solidFill>
-                  <a:srgbClr val="0F2040"/>
-                </a:solidFill>
-                <a:latin typeface="Calibri"/>
-              </a:rPr>
-              <a:t>Inventario (ver y editar movimientos)</a:t>
-            </a:r>
-          </a:p>
-          <a:p>
-            <a:pPr algn="l">
-              <a:lnSpc>
-                <a:spcPct val="140000"/>
-              </a:lnSpc>
-              <a:spcAft>
-                <a:spcPts val="800"/>
-              </a:spcAft>
-            </a:pPr>
-            <a:r>
-              <a:rPr sz="1600" b="1">
-                <a:solidFill>
-                  <a:srgbClr val="0369A1"/>
-                </a:solidFill>
-                <a:latin typeface="Calibri"/>
-              </a:rPr>
-              <a:t>● </a:t>
-            </a:r>
-            <a:r>
-              <a:rPr sz="1600">
-                <a:solidFill>
-                  <a:srgbClr val="0F2040"/>
-                </a:solidFill>
-                <a:latin typeface="Calibri"/>
-              </a:rPr>
-              <a:t>Solicitud de Compras (crear + aprobar etapa 1)</a:t>
-            </a:r>
-          </a:p>
-          <a:p>
-            <a:pPr algn="l">
-              <a:lnSpc>
-                <a:spcPct val="140000"/>
-              </a:lnSpc>
-              <a:spcAft>
-                <a:spcPts val="800"/>
-              </a:spcAft>
-            </a:pPr>
-            <a:r>
-              <a:rPr sz="1600" b="1">
-                <a:solidFill>
-                  <a:srgbClr val="0369A1"/>
-                </a:solidFill>
-                <a:latin typeface="Calibri"/>
-              </a:rPr>
-              <a:t>● </a:t>
-            </a:r>
-            <a:r>
-              <a:rPr sz="1600">
-                <a:solidFill>
-                  <a:srgbClr val="0F2040"/>
-                </a:solidFill>
-                <a:latin typeface="Calibri"/>
-              </a:rPr>
-              <a:t>Proveedores (ver), Centro de Costos (ver)</a:t>
-            </a:r>
-          </a:p>
-          <a:p>
-            <a:pPr algn="l">
-              <a:lnSpc>
-                <a:spcPct val="140000"/>
-              </a:lnSpc>
-              <a:spcAft>
-                <a:spcPts val="800"/>
-              </a:spcAft>
-            </a:pPr>
-            <a:r>
-              <a:rPr sz="1600" b="1">
-                <a:solidFill>
-                  <a:srgbClr val="0369A1"/>
-                </a:solidFill>
-                <a:latin typeface="Calibri"/>
-              </a:rPr>
-              <a:t>● </a:t>
-            </a:r>
-            <a:r>
-              <a:rPr sz="1600">
-                <a:solidFill>
-                  <a:srgbClr val="0F2040"/>
-                </a:solidFill>
-                <a:latin typeface="Calibri"/>
-              </a:rPr>
-              <a:t>Catálogos (ver)</a:t>
-            </a:r>
-          </a:p>
-          <a:p>
-            <a:pPr algn="l">
-              <a:lnSpc>
-                <a:spcPct val="140000"/>
-              </a:lnSpc>
-              <a:spcAft>
-                <a:spcPts val="800"/>
-              </a:spcAft>
-            </a:pPr>
-            <a:r>
-              <a:rPr sz="1600" b="1">
-                <a:solidFill>
-                  <a:srgbClr val="0369A1"/>
-                </a:solidFill>
-                <a:latin typeface="Calibri"/>
-              </a:rPr>
-              <a:t>● </a:t>
-            </a:r>
-            <a:r>
-              <a:rPr sz="1600">
-                <a:solidFill>
-                  <a:srgbClr val="0F2040"/>
-                </a:solidFill>
-                <a:latin typeface="Calibri"/>
-              </a:rPr>
-              <a:t>Rondas (ver + registrar)</a:t>
-            </a:r>
-          </a:p>
-          <a:p>
-            <a:pPr algn="l">
-              <a:lnSpc>
-                <a:spcPct val="140000"/>
-              </a:lnSpc>
-              <a:spcAft>
-                <a:spcPts val="800"/>
-              </a:spcAft>
-            </a:pPr>
-            <a:r>
-              <a:rPr sz="1600" b="1">
-                <a:solidFill>
-                  <a:srgbClr val="0369A1"/>
-                </a:solidFill>
-                <a:latin typeface="Calibri"/>
-              </a:rPr>
-              <a:t>● </a:t>
-            </a:r>
-            <a:r>
-              <a:rPr sz="1600">
-                <a:solidFill>
-                  <a:srgbClr val="0F2040"/>
-                </a:solidFill>
-                <a:latin typeface="Calibri"/>
-              </a:rPr>
-              <a:t>Reportes (ver y exportar)</a:t>
-            </a:r>
-          </a:p>
-          <a:p>
-            <a:pPr algn="l">
-              <a:lnSpc>
-                <a:spcPct val="140000"/>
-              </a:lnSpc>
-              <a:spcAft>
-                <a:spcPts val="800"/>
-              </a:spcAft>
-            </a:pPr>
-            <a:r>
-              <a:rPr sz="1600" b="1">
-                <a:solidFill>
-                  <a:srgbClr val="0369A1"/>
-                </a:solidFill>
-                <a:latin typeface="Calibri"/>
-              </a:rPr>
-              <a:t>● </a:t>
-            </a:r>
-            <a:r>
-              <a:rPr sz="1600">
-                <a:solidFill>
-                  <a:srgbClr val="0F2040"/>
-                </a:solidFill>
-                <a:latin typeface="Calibri"/>
-              </a:rPr>
-              <a:t>Notificaciones</a:t>
+              <a:t>Vista del Dashboard con métricas operativas</a:t>
             </a:r>
           </a:p>
         </p:txBody>
@@ -5257,7 +5599,7 @@
     <p:bg>
       <p:bgPr>
         <a:solidFill>
-          <a:srgbClr val="0F2040"/>
+          <a:srgbClr val="FFFFFF"/>
         </a:solidFill>
         <a:effectLst/>
       </p:bgPr>
@@ -5277,14 +5619,14 @@
         </p:nvSpPr>
         <p:spPr>
           <a:xfrm>
-            <a:off x="0" y="3108960"/>
-            <a:ext cx="12191695" cy="73152"/>
+            <a:off x="0" y="0"/>
+            <a:ext cx="12191695" cy="822960"/>
           </a:xfrm>
           <a:prstGeom prst="rect">
             <a:avLst/>
           </a:prstGeom>
           <a:solidFill>
-            <a:srgbClr val="0369A1"/>
+            <a:srgbClr val="0A1172"/>
           </a:solidFill>
           <a:ln>
             <a:noFill/>
@@ -5321,8 +5663,8 @@
         </p:nvSpPr>
         <p:spPr>
           <a:xfrm>
-            <a:off x="731520" y="2560320"/>
-            <a:ext cx="10698480" cy="640080"/>
+            <a:off x="365760" y="137160"/>
+            <a:ext cx="10058400" cy="548640"/>
           </a:xfrm>
           <a:prstGeom prst="rect">
             <a:avLst/>
@@ -5335,22 +5677,116 @@
           </a:bodyPr>
           <a:lstStyle/>
           <a:p>
+            <a:pPr algn="l"/>
+            <a:r>
+              <a:rPr sz="2200" b="1">
+                <a:solidFill>
+                  <a:srgbClr val="FFFFFF"/>
+                </a:solidFill>
+                <a:latin typeface="Calibri"/>
+              </a:rPr>
+              <a:t>Solicitudes de Compra</a:t>
+            </a:r>
+          </a:p>
+        </p:txBody>
+      </p:sp>
+      <p:sp>
+        <p:nvSpPr>
+          <p:cNvPr id="4" name="TextBox 3"/>
+          <p:cNvSpPr txBox="1"/>
+          <p:nvPr/>
+        </p:nvSpPr>
+        <p:spPr>
+          <a:xfrm>
+            <a:off x="11247120" y="137160"/>
+            <a:ext cx="731520" cy="548640"/>
+          </a:xfrm>
+          <a:prstGeom prst="rect">
+            <a:avLst/>
+          </a:prstGeom>
+          <a:noFill/>
+        </p:spPr>
+        <p:txBody>
+          <a:bodyPr wrap="square" anchor="ctr" lIns="45720" rIns="45720">
+            <a:spAutoFit/>
+          </a:bodyPr>
+          <a:lstStyle/>
+          <a:p>
+            <a:pPr algn="r"/>
+            <a:r>
+              <a:rPr sz="1400" b="0">
+                <a:solidFill>
+                  <a:srgbClr val="F59E0B"/>
+                </a:solidFill>
+                <a:latin typeface="Calibri"/>
+              </a:rPr>
+              <a:t>4</a:t>
+            </a:r>
+          </a:p>
+        </p:txBody>
+      </p:sp>
+      <p:pic>
+        <p:nvPicPr>
+          <p:cNvPr id="5" name="Picture 4" descr="06_solicitudes_compra.png"/>
+          <p:cNvPicPr>
+            <a:picLocks noChangeAspect="1"/>
+          </p:cNvPicPr>
+          <p:nvPr/>
+        </p:nvPicPr>
+        <p:blipFill>
+          <a:blip r:embed="rId2"/>
+          <a:stretch>
+            <a:fillRect/>
+          </a:stretch>
+        </p:blipFill>
+        <p:spPr>
+          <a:xfrm>
+            <a:off x="1386687" y="1097280"/>
+            <a:ext cx="9418320" cy="5886450"/>
+          </a:xfrm>
+          <a:prstGeom prst="rect">
+            <a:avLst/>
+          </a:prstGeom>
+        </p:spPr>
+      </p:pic>
+      <p:sp>
+        <p:nvSpPr>
+          <p:cNvPr id="6" name="TextBox 5"/>
+          <p:cNvSpPr txBox="1"/>
+          <p:nvPr/>
+        </p:nvSpPr>
+        <p:spPr>
+          <a:xfrm>
+            <a:off x="914400" y="6035040"/>
+            <a:ext cx="10332720" cy="457200"/>
+          </a:xfrm>
+          <a:prstGeom prst="rect">
+            <a:avLst/>
+          </a:prstGeom>
+          <a:noFill/>
+        </p:spPr>
+        <p:txBody>
+          <a:bodyPr wrap="square" anchor="ctr" lIns="45720" rIns="45720">
+            <a:spAutoFit/>
+          </a:bodyPr>
+          <a:lstStyle/>
+          <a:p>
             <a:pPr algn="ctr"/>
             <a:r>
-              <a:rPr sz="3600" b="1">
-                <a:solidFill>
-                  <a:srgbClr val="FFFFFF"/>
+              <a:rPr sz="1200" b="0">
+                <a:solidFill>
+                  <a:srgbClr val="666666"/>
                 </a:solidFill>
                 <a:latin typeface="Calibri"/>
               </a:rPr>
-              <a:t>Tu rol en los flujos</a:t>
-            </a:r>
-          </a:p>
-        </p:txBody>
-      </p:sp>
-      <p:sp>
-        <p:nvSpPr>
-          <p:cNvPr id="4" name="Rectangle 3"/>
+              <a:t>Módulo SC — el supervisor ve botones "Aprobar/Rechazar" en etapa 1</a:t>
+            </a:r>
+          </a:p>
+        </p:txBody>
+      </p:sp>
+      <p:sp>
+        <p:nvSpPr>
+          <p:cNvPr id="7" name="Rectangle 6"/>
           <p:cNvSpPr/>
           <p:nvPr/>
         </p:nvSpPr>
@@ -5394,7 +5830,7 @@
       </p:sp>
       <p:sp>
         <p:nvSpPr>
-          <p:cNvPr id="5" name="TextBox 4"/>
+          <p:cNvPr id="8" name="TextBox 7"/>
           <p:cNvSpPr txBox="1"/>
           <p:nvPr/>
         </p:nvSpPr>
@@ -5429,7 +5865,7 @@
       </p:sp>
       <p:sp>
         <p:nvSpPr>
-          <p:cNvPr id="6" name="TextBox 5"/>
+          <p:cNvPr id="9" name="TextBox 8"/>
           <p:cNvSpPr txBox="1"/>
           <p:nvPr/>
         </p:nvSpPr>
@@ -5562,7 +5998,7 @@
                 </a:solidFill>
                 <a:latin typeface="Calibri"/>
               </a:rPr>
-              <a:t>Flujo SC: Tu rol es clave</a:t>
+              <a:t>Flujo: Aprobar SC (Etapa 1)</a:t>
             </a:r>
           </a:p>
         </p:txBody>
@@ -5604,20 +6040,260 @@
       </p:sp>
       <p:sp>
         <p:nvSpPr>
-          <p:cNvPr id="5" name="Rounded Rectangle 4"/>
+          <p:cNvPr id="5" name="TextBox 4"/>
+          <p:cNvSpPr txBox="1"/>
+          <p:nvPr/>
+        </p:nvSpPr>
+        <p:spPr>
+          <a:xfrm>
+            <a:off x="457200" y="1005840"/>
+            <a:ext cx="11247120" cy="548640"/>
+          </a:xfrm>
+          <a:prstGeom prst="rect">
+            <a:avLst/>
+          </a:prstGeom>
+          <a:noFill/>
+        </p:spPr>
+        <p:txBody>
+          <a:bodyPr wrap="square" anchor="t" lIns="45720" rIns="45720">
+            <a:spAutoFit/>
+          </a:bodyPr>
+          <a:lstStyle/>
+          <a:p>
+            <a:pPr algn="l"/>
+            <a:r>
+              <a:rPr sz="1400" b="0">
+                <a:solidFill>
+                  <a:srgbClr val="666666"/>
+                </a:solidFill>
+                <a:latin typeface="Calibri"/>
+              </a:rPr>
+              <a:t>Tu rol es clave en el flujo de SC:</a:t>
+            </a:r>
+          </a:p>
+        </p:txBody>
+      </p:sp>
+      <p:sp>
+        <p:nvSpPr>
+          <p:cNvPr id="6" name="TextBox 5"/>
+          <p:cNvSpPr txBox="1"/>
+          <p:nvPr/>
+        </p:nvSpPr>
+        <p:spPr>
+          <a:xfrm>
+            <a:off x="640080" y="1645920"/>
+            <a:ext cx="10972800" cy="4572000"/>
+          </a:xfrm>
+          <a:prstGeom prst="rect">
+            <a:avLst/>
+          </a:prstGeom>
+          <a:noFill/>
+        </p:spPr>
+        <p:txBody>
+          <a:bodyPr wrap="square">
+            <a:spAutoFit/>
+          </a:bodyPr>
+          <a:lstStyle/>
+          <a:p>
+            <a:pPr algn="l">
+              <a:lnSpc>
+                <a:spcPct val="150000"/>
+              </a:lnSpc>
+              <a:spcAft>
+                <a:spcPts val="1000"/>
+              </a:spcAft>
+            </a:pPr>
+            <a:r>
+              <a:rPr sz="2000" b="1">
+                <a:solidFill>
+                  <a:srgbClr val="0369A1"/>
+                </a:solidFill>
+              </a:rPr>
+              <a:t>1.  </a:t>
+            </a:r>
+            <a:r>
+              <a:rPr sz="1600">
+                <a:solidFill>
+                  <a:srgbClr val="0F2040"/>
+                </a:solidFill>
+              </a:rPr>
+              <a:t>Ve a Solicitud de Compras</a:t>
+            </a:r>
+          </a:p>
+          <a:p>
+            <a:pPr algn="l">
+              <a:lnSpc>
+                <a:spcPct val="150000"/>
+              </a:lnSpc>
+              <a:spcAft>
+                <a:spcPts val="1000"/>
+              </a:spcAft>
+            </a:pPr>
+            <a:r>
+              <a:rPr sz="2000" b="1">
+                <a:solidFill>
+                  <a:srgbClr val="0369A1"/>
+                </a:solidFill>
+              </a:rPr>
+              <a:t>2.  </a:t>
+            </a:r>
+            <a:r>
+              <a:rPr sz="1600">
+                <a:solidFill>
+                  <a:srgbClr val="0F2040"/>
+                </a:solidFill>
+              </a:rPr>
+              <a:t>Filtra por etapa "Pendiente Supervisor"</a:t>
+            </a:r>
+          </a:p>
+          <a:p>
+            <a:pPr algn="l">
+              <a:lnSpc>
+                <a:spcPct val="150000"/>
+              </a:lnSpc>
+              <a:spcAft>
+                <a:spcPts val="1000"/>
+              </a:spcAft>
+            </a:pPr>
+            <a:r>
+              <a:rPr sz="2000" b="1">
+                <a:solidFill>
+                  <a:srgbClr val="0369A1"/>
+                </a:solidFill>
+              </a:rPr>
+              <a:t>3.  </a:t>
+            </a:r>
+            <a:r>
+              <a:rPr sz="1600">
+                <a:solidFill>
+                  <a:srgbClr val="0F2040"/>
+                </a:solidFill>
+              </a:rPr>
+              <a:t>Revisa: materiales, cantidades, precios, justificación</a:t>
+            </a:r>
+          </a:p>
+          <a:p>
+            <a:pPr algn="l">
+              <a:lnSpc>
+                <a:spcPct val="150000"/>
+              </a:lnSpc>
+              <a:spcAft>
+                <a:spcPts val="1000"/>
+              </a:spcAft>
+            </a:pPr>
+            <a:r>
+              <a:rPr sz="2000" b="1">
+                <a:solidFill>
+                  <a:srgbClr val="0369A1"/>
+                </a:solidFill>
+              </a:rPr>
+              <a:t>4.  </a:t>
+            </a:r>
+            <a:r>
+              <a:rPr sz="1600">
+                <a:solidFill>
+                  <a:srgbClr val="0F2040"/>
+                </a:solidFill>
+              </a:rPr>
+              <a:t>Si procede: botón "Aprobar" (verde)</a:t>
+            </a:r>
+          </a:p>
+          <a:p>
+            <a:pPr algn="l">
+              <a:lnSpc>
+                <a:spcPct val="150000"/>
+              </a:lnSpc>
+              <a:spcAft>
+                <a:spcPts val="1000"/>
+              </a:spcAft>
+            </a:pPr>
+            <a:r>
+              <a:rPr sz="2000" b="1">
+                <a:solidFill>
+                  <a:srgbClr val="0369A1"/>
+                </a:solidFill>
+              </a:rPr>
+              <a:t>5.  </a:t>
+            </a:r>
+            <a:r>
+              <a:rPr sz="1600">
+                <a:solidFill>
+                  <a:srgbClr val="0F2040"/>
+                </a:solidFill>
+              </a:rPr>
+              <a:t>Si no procede: botón "Rechazar" (rojo) + motivo</a:t>
+            </a:r>
+          </a:p>
+          <a:p>
+            <a:pPr algn="l">
+              <a:lnSpc>
+                <a:spcPct val="150000"/>
+              </a:lnSpc>
+              <a:spcAft>
+                <a:spcPts val="1000"/>
+              </a:spcAft>
+            </a:pPr>
+            <a:r>
+              <a:rPr sz="2000" b="1">
+                <a:solidFill>
+                  <a:srgbClr val="0369A1"/>
+                </a:solidFill>
+              </a:rPr>
+              <a:t>6.  </a:t>
+            </a:r>
+            <a:r>
+              <a:rPr sz="1600">
+                <a:solidFill>
+                  <a:srgbClr val="0F2040"/>
+                </a:solidFill>
+              </a:rPr>
+              <a:t>Al aprobar → se notifica automáticamente al admin</a:t>
+            </a:r>
+          </a:p>
+          <a:p>
+            <a:pPr algn="l">
+              <a:lnSpc>
+                <a:spcPct val="150000"/>
+              </a:lnSpc>
+              <a:spcAft>
+                <a:spcPts val="1000"/>
+              </a:spcAft>
+            </a:pPr>
+            <a:r>
+              <a:rPr sz="2000" b="1">
+                <a:solidFill>
+                  <a:srgbClr val="0369A1"/>
+                </a:solidFill>
+              </a:rPr>
+              <a:t>7.  </a:t>
+            </a:r>
+            <a:r>
+              <a:rPr sz="1600">
+                <a:solidFill>
+                  <a:srgbClr val="0F2040"/>
+                </a:solidFill>
+              </a:rPr>
+              <a:t>El admin verá la SC en etapa "Aprobada Supervisor"</a:t>
+            </a:r>
+          </a:p>
+        </p:txBody>
+      </p:sp>
+      <p:sp>
+        <p:nvSpPr>
+          <p:cNvPr id="7" name="Rectangle 6"/>
           <p:cNvSpPr/>
           <p:nvPr/>
         </p:nvSpPr>
         <p:spPr>
           <a:xfrm>
-            <a:off x="365760" y="1097280"/>
-            <a:ext cx="5577840" cy="548640"/>
-          </a:xfrm>
-          <a:prstGeom prst="roundRect">
+            <a:off x="0" y="6583680"/>
+            <a:ext cx="12191695" cy="274320"/>
+          </a:xfrm>
+          <a:prstGeom prst="rect">
             <a:avLst/>
           </a:prstGeom>
           <a:solidFill>
-            <a:srgbClr val="0369A1"/>
+            <a:srgbClr val="0F2040"/>
           </a:solidFill>
           <a:ln>
             <a:noFill/>
@@ -5648,14 +6324,14 @@
       </p:sp>
       <p:sp>
         <p:nvSpPr>
-          <p:cNvPr id="6" name="TextBox 5"/>
+          <p:cNvPr id="8" name="TextBox 7"/>
           <p:cNvSpPr txBox="1"/>
           <p:nvPr/>
         </p:nvSpPr>
         <p:spPr>
           <a:xfrm>
-            <a:off x="365760" y="1097280"/>
-            <a:ext cx="5577840" cy="548640"/>
+            <a:off x="365760" y="6583680"/>
+            <a:ext cx="6400800" cy="274320"/>
           </a:xfrm>
           <a:prstGeom prst="rect">
             <a:avLst/>
@@ -5668,506 +6344,22 @@
           </a:bodyPr>
           <a:lstStyle/>
           <a:p>
-            <a:pPr algn="ctr"/>
-            <a:r>
-              <a:rPr sz="1800" b="1">
+            <a:pPr algn="l"/>
+            <a:r>
+              <a:rPr sz="900" b="0">
                 <a:solidFill>
                   <a:srgbClr val="FFFFFF"/>
                 </a:solidFill>
                 <a:latin typeface="Calibri"/>
               </a:rPr>
-              <a:t>Solicitudes de Compra — Tu apruebas PRIMERO:</a:t>
-            </a:r>
-          </a:p>
-        </p:txBody>
-      </p:sp>
-      <p:sp>
-        <p:nvSpPr>
-          <p:cNvPr id="7" name="TextBox 6"/>
-          <p:cNvSpPr txBox="1"/>
-          <p:nvPr/>
-        </p:nvSpPr>
-        <p:spPr>
-          <a:xfrm>
-            <a:off x="457200" y="1828800"/>
-            <a:ext cx="5394960" cy="4572000"/>
-          </a:xfrm>
-          <a:prstGeom prst="rect">
-            <a:avLst/>
-          </a:prstGeom>
-          <a:noFill/>
-        </p:spPr>
-        <p:txBody>
-          <a:bodyPr wrap="square">
-            <a:spAutoFit/>
-          </a:bodyPr>
-          <a:lstStyle/>
-          <a:p>
-            <a:pPr algn="l">
-              <a:lnSpc>
-                <a:spcPct val="140000"/>
-              </a:lnSpc>
-              <a:spcAft>
-                <a:spcPts val="800"/>
-              </a:spcAft>
-            </a:pPr>
-            <a:r>
-              <a:rPr sz="1400" b="1">
-                <a:solidFill>
-                  <a:srgbClr val="0369A1"/>
-                </a:solidFill>
-                <a:latin typeface="Calibri"/>
-              </a:rPr>
-              <a:t>● </a:t>
-            </a:r>
-            <a:r>
-              <a:rPr sz="1400">
-                <a:solidFill>
-                  <a:srgbClr val="0F2040"/>
-                </a:solidFill>
-                <a:latin typeface="Calibri"/>
-              </a:rPr>
-              <a:t>Cuando alguien crea una SC → etapa "Pendiente Supervisor"</a:t>
-            </a:r>
-          </a:p>
-          <a:p>
-            <a:pPr algn="l">
-              <a:lnSpc>
-                <a:spcPct val="140000"/>
-              </a:lnSpc>
-              <a:spcAft>
-                <a:spcPts val="800"/>
-              </a:spcAft>
-            </a:pPr>
-            <a:r>
-              <a:rPr sz="1400" b="1">
-                <a:solidFill>
-                  <a:srgbClr val="0369A1"/>
-                </a:solidFill>
-                <a:latin typeface="Calibri"/>
-              </a:rPr>
-              <a:t>● </a:t>
-            </a:r>
-            <a:r>
-              <a:rPr sz="1400">
-                <a:solidFill>
-                  <a:srgbClr val="0F2040"/>
-                </a:solidFill>
-                <a:latin typeface="Calibri"/>
-              </a:rPr>
-              <a:t>Solo TÚ (rol supervisor) ves los botones Aprobar/Rechazar</a:t>
-            </a:r>
-          </a:p>
-          <a:p>
-            <a:pPr algn="l">
-              <a:lnSpc>
-                <a:spcPct val="140000"/>
-              </a:lnSpc>
-              <a:spcAft>
-                <a:spcPts val="800"/>
-              </a:spcAft>
-            </a:pPr>
-            <a:r>
-              <a:rPr sz="1400" b="1">
-                <a:solidFill>
-                  <a:srgbClr val="0369A1"/>
-                </a:solidFill>
-                <a:latin typeface="Calibri"/>
-              </a:rPr>
-              <a:t>● </a:t>
-            </a:r>
-            <a:r>
-              <a:rPr sz="1400">
-                <a:solidFill>
-                  <a:srgbClr val="0F2040"/>
-                </a:solidFill>
-                <a:latin typeface="Calibri"/>
-              </a:rPr>
-              <a:t>El admin NO puede aprobar en esta etapa (solo en la siguiente)</a:t>
-            </a:r>
-          </a:p>
-          <a:p>
-            <a:pPr algn="l">
-              <a:lnSpc>
-                <a:spcPct val="140000"/>
-              </a:lnSpc>
-              <a:spcAft>
-                <a:spcPts val="800"/>
-              </a:spcAft>
-            </a:pPr>
-            <a:r>
-              <a:rPr sz="1400" b="1">
-                <a:solidFill>
-                  <a:srgbClr val="0369A1"/>
-                </a:solidFill>
-                <a:latin typeface="Calibri"/>
-              </a:rPr>
-              <a:t>● </a:t>
-            </a:r>
-            <a:r>
-              <a:rPr sz="1400">
-                <a:solidFill>
-                  <a:srgbClr val="0F2040"/>
-                </a:solidFill>
-                <a:latin typeface="Calibri"/>
-              </a:rPr>
-              <a:t>Si apruebas → pasa al admin para gestionar compra</a:t>
-            </a:r>
-          </a:p>
-          <a:p>
-            <a:pPr algn="l">
-              <a:lnSpc>
-                <a:spcPct val="140000"/>
-              </a:lnSpc>
-              <a:spcAft>
-                <a:spcPts val="800"/>
-              </a:spcAft>
-            </a:pPr>
-            <a:r>
-              <a:rPr sz="1400" b="1">
-                <a:solidFill>
-                  <a:srgbClr val="0369A1"/>
-                </a:solidFill>
-                <a:latin typeface="Calibri"/>
-              </a:rPr>
-              <a:t>● </a:t>
-            </a:r>
-            <a:r>
-              <a:rPr sz="1400">
-                <a:solidFill>
-                  <a:srgbClr val="0F2040"/>
-                </a:solidFill>
-                <a:latin typeface="Calibri"/>
-              </a:rPr>
-              <a:t>Si rechazas → estado "Rechazada" + motivo obligatorio</a:t>
-            </a:r>
-          </a:p>
-        </p:txBody>
-      </p:sp>
-      <p:sp>
-        <p:nvSpPr>
-          <p:cNvPr id="8" name="Rounded Rectangle 7"/>
-          <p:cNvSpPr/>
-          <p:nvPr/>
-        </p:nvSpPr>
-        <p:spPr>
-          <a:xfrm>
-            <a:off x="6217920" y="1097280"/>
-            <a:ext cx="5577840" cy="548640"/>
-          </a:xfrm>
-          <a:prstGeom prst="roundRect">
-            <a:avLst/>
-          </a:prstGeom>
-          <a:solidFill>
-            <a:srgbClr val="0A1172"/>
-          </a:solidFill>
-          <a:ln>
-            <a:noFill/>
-          </a:ln>
-          <a:effectLst/>
-        </p:spPr>
-        <p:style>
-          <a:lnRef idx="1">
-            <a:schemeClr val="accent1"/>
-          </a:lnRef>
-          <a:fillRef idx="3">
-            <a:schemeClr val="accent1"/>
-          </a:fillRef>
-          <a:effectRef idx="2">
-            <a:schemeClr val="accent1"/>
-          </a:effectRef>
-          <a:fontRef idx="minor">
-            <a:schemeClr val="lt1"/>
-          </a:fontRef>
-        </p:style>
-        <p:txBody>
-          <a:bodyPr rtlCol="0" anchor="ctr"/>
-          <a:lstStyle/>
-          <a:p>
-            <a:pPr algn="ctr"/>
+              <a:t>Asesorías Integrales CyJ · Capacitación Supervisor</a:t>
+            </a:r>
           </a:p>
         </p:txBody>
       </p:sp>
       <p:sp>
         <p:nvSpPr>
           <p:cNvPr id="9" name="TextBox 8"/>
-          <p:cNvSpPr txBox="1"/>
-          <p:nvPr/>
-        </p:nvSpPr>
-        <p:spPr>
-          <a:xfrm>
-            <a:off x="6217920" y="1097280"/>
-            <a:ext cx="5577840" cy="548640"/>
-          </a:xfrm>
-          <a:prstGeom prst="rect">
-            <a:avLst/>
-          </a:prstGeom>
-          <a:noFill/>
-        </p:spPr>
-        <p:txBody>
-          <a:bodyPr wrap="square" anchor="ctr" lIns="45720" rIns="45720">
-            <a:spAutoFit/>
-          </a:bodyPr>
-          <a:lstStyle/>
-          <a:p>
-            <a:pPr algn="ctr"/>
-            <a:r>
-              <a:rPr sz="1800" b="1">
-                <a:solidFill>
-                  <a:srgbClr val="FFFFFF"/>
-                </a:solidFill>
-                <a:latin typeface="Calibri"/>
-              </a:rPr>
-              <a:t>Acciones que puedes hacer:</a:t>
-            </a:r>
-          </a:p>
-        </p:txBody>
-      </p:sp>
-      <p:sp>
-        <p:nvSpPr>
-          <p:cNvPr id="10" name="TextBox 9"/>
-          <p:cNvSpPr txBox="1"/>
-          <p:nvPr/>
-        </p:nvSpPr>
-        <p:spPr>
-          <a:xfrm>
-            <a:off x="6309360" y="1828800"/>
-            <a:ext cx="5394960" cy="4572000"/>
-          </a:xfrm>
-          <a:prstGeom prst="rect">
-            <a:avLst/>
-          </a:prstGeom>
-          <a:noFill/>
-        </p:spPr>
-        <p:txBody>
-          <a:bodyPr wrap="square">
-            <a:spAutoFit/>
-          </a:bodyPr>
-          <a:lstStyle/>
-          <a:p>
-            <a:pPr algn="l">
-              <a:lnSpc>
-                <a:spcPct val="140000"/>
-              </a:lnSpc>
-              <a:spcAft>
-                <a:spcPts val="800"/>
-              </a:spcAft>
-            </a:pPr>
-            <a:r>
-              <a:rPr sz="1400" b="1">
-                <a:solidFill>
-                  <a:srgbClr val="0A1172"/>
-                </a:solidFill>
-                <a:latin typeface="Calibri"/>
-              </a:rPr>
-              <a:t>● </a:t>
-            </a:r>
-            <a:r>
-              <a:rPr sz="1400">
-                <a:solidFill>
-                  <a:srgbClr val="0F2040"/>
-                </a:solidFill>
-                <a:latin typeface="Calibri"/>
-              </a:rPr>
-              <a:t>Aprobar SC (botón verde "Aprobar")</a:t>
-            </a:r>
-          </a:p>
-          <a:p>
-            <a:pPr algn="l">
-              <a:lnSpc>
-                <a:spcPct val="140000"/>
-              </a:lnSpc>
-              <a:spcAft>
-                <a:spcPts val="800"/>
-              </a:spcAft>
-            </a:pPr>
-            <a:r>
-              <a:rPr sz="1400" b="1">
-                <a:solidFill>
-                  <a:srgbClr val="0A1172"/>
-                </a:solidFill>
-                <a:latin typeface="Calibri"/>
-              </a:rPr>
-              <a:t>● </a:t>
-            </a:r>
-            <a:r>
-              <a:rPr sz="1400">
-                <a:solidFill>
-                  <a:srgbClr val="0F2040"/>
-                </a:solidFill>
-                <a:latin typeface="Calibri"/>
-              </a:rPr>
-              <a:t>Rechazar SC (botón rojo "Rechazar" + motivo)</a:t>
-            </a:r>
-          </a:p>
-          <a:p>
-            <a:pPr algn="l">
-              <a:lnSpc>
-                <a:spcPct val="140000"/>
-              </a:lnSpc>
-              <a:spcAft>
-                <a:spcPts val="800"/>
-              </a:spcAft>
-            </a:pPr>
-            <a:r>
-              <a:rPr sz="1400" b="1">
-                <a:solidFill>
-                  <a:srgbClr val="0A1172"/>
-                </a:solidFill>
-                <a:latin typeface="Calibri"/>
-              </a:rPr>
-              <a:t>● </a:t>
-            </a:r>
-            <a:r>
-              <a:rPr sz="1400">
-                <a:solidFill>
-                  <a:srgbClr val="0F2040"/>
-                </a:solidFill>
-                <a:latin typeface="Calibri"/>
-              </a:rPr>
-              <a:t>Crear tus propias SC (también pasan por tu aprobación)</a:t>
-            </a:r>
-          </a:p>
-          <a:p>
-            <a:pPr algn="l">
-              <a:lnSpc>
-                <a:spcPct val="140000"/>
-              </a:lnSpc>
-              <a:spcAft>
-                <a:spcPts val="800"/>
-              </a:spcAft>
-            </a:pPr>
-            <a:r>
-              <a:rPr sz="1400" b="1">
-                <a:solidFill>
-                  <a:srgbClr val="0A1172"/>
-                </a:solidFill>
-                <a:latin typeface="Calibri"/>
-              </a:rPr>
-              <a:t>● </a:t>
-            </a:r>
-            <a:r>
-              <a:rPr sz="1400">
-                <a:solidFill>
-                  <a:srgbClr val="0F2040"/>
-                </a:solidFill>
-                <a:latin typeface="Calibri"/>
-              </a:rPr>
-              <a:t>Ver todas las SC del sistema</a:t>
-            </a:r>
-          </a:p>
-          <a:p>
-            <a:pPr algn="l">
-              <a:lnSpc>
-                <a:spcPct val="140000"/>
-              </a:lnSpc>
-              <a:spcAft>
-                <a:spcPts val="800"/>
-              </a:spcAft>
-            </a:pPr>
-            <a:r>
-              <a:rPr sz="1400" b="1">
-                <a:solidFill>
-                  <a:srgbClr val="0A1172"/>
-                </a:solidFill>
-                <a:latin typeface="Calibri"/>
-              </a:rPr>
-              <a:t>● </a:t>
-            </a:r>
-            <a:r>
-              <a:rPr sz="1400">
-                <a:solidFill>
-                  <a:srgbClr val="0F2040"/>
-                </a:solidFill>
-                <a:latin typeface="Calibri"/>
-              </a:rPr>
-              <a:t>Recibir notificaciones cuando el admin gestiona</a:t>
-            </a:r>
-          </a:p>
-        </p:txBody>
-      </p:sp>
-      <p:sp>
-        <p:nvSpPr>
-          <p:cNvPr id="11" name="Rectangle 10"/>
-          <p:cNvSpPr/>
-          <p:nvPr/>
-        </p:nvSpPr>
-        <p:spPr>
-          <a:xfrm>
-            <a:off x="0" y="6583680"/>
-            <a:ext cx="12191695" cy="274320"/>
-          </a:xfrm>
-          <a:prstGeom prst="rect">
-            <a:avLst/>
-          </a:prstGeom>
-          <a:solidFill>
-            <a:srgbClr val="0F2040"/>
-          </a:solidFill>
-          <a:ln>
-            <a:noFill/>
-          </a:ln>
-          <a:effectLst/>
-        </p:spPr>
-        <p:style>
-          <a:lnRef idx="1">
-            <a:schemeClr val="accent1"/>
-          </a:lnRef>
-          <a:fillRef idx="3">
-            <a:schemeClr val="accent1"/>
-          </a:fillRef>
-          <a:effectRef idx="2">
-            <a:schemeClr val="accent1"/>
-          </a:effectRef>
-          <a:fontRef idx="minor">
-            <a:schemeClr val="lt1"/>
-          </a:fontRef>
-        </p:style>
-        <p:txBody>
-          <a:bodyPr rtlCol="0" anchor="ctr"/>
-          <a:lstStyle/>
-          <a:p>
-            <a:pPr algn="ctr"/>
-          </a:p>
-        </p:txBody>
-      </p:sp>
-      <p:sp>
-        <p:nvSpPr>
-          <p:cNvPr id="12" name="TextBox 11"/>
-          <p:cNvSpPr txBox="1"/>
-          <p:nvPr/>
-        </p:nvSpPr>
-        <p:spPr>
-          <a:xfrm>
-            <a:off x="365760" y="6583680"/>
-            <a:ext cx="6400800" cy="274320"/>
-          </a:xfrm>
-          <a:prstGeom prst="rect">
-            <a:avLst/>
-          </a:prstGeom>
-          <a:noFill/>
-        </p:spPr>
-        <p:txBody>
-          <a:bodyPr wrap="square" anchor="ctr" lIns="45720" rIns="45720">
-            <a:spAutoFit/>
-          </a:bodyPr>
-          <a:lstStyle/>
-          <a:p>
-            <a:pPr algn="l"/>
-            <a:r>
-              <a:rPr sz="900" b="0">
-                <a:solidFill>
-                  <a:srgbClr val="FFFFFF"/>
-                </a:solidFill>
-                <a:latin typeface="Calibri"/>
-              </a:rPr>
-              <a:t>Asesorías Integrales CyJ · Capacitación Supervisor</a:t>
-            </a:r>
-          </a:p>
-        </p:txBody>
-      </p:sp>
-      <p:sp>
-        <p:nvSpPr>
-          <p:cNvPr id="13" name="TextBox 12"/>
           <p:cNvSpPr txBox="1"/>
           <p:nvPr/>
         </p:nvSpPr>
@@ -6300,7 +6492,7 @@
                 </a:solidFill>
                 <a:latin typeface="Calibri"/>
               </a:rPr>
-              <a:t>Flujo: Aprobar SC (Etapa 1)</a:t>
+              <a:t>Importante: SC que tú creas</a:t>
             </a:r>
           </a:p>
         </p:txBody>
@@ -6342,274 +6534,20 @@
       </p:sp>
       <p:sp>
         <p:nvSpPr>
-          <p:cNvPr id="5" name="TextBox 4"/>
-          <p:cNvSpPr txBox="1"/>
-          <p:nvPr/>
-        </p:nvSpPr>
-        <p:spPr>
-          <a:xfrm>
-            <a:off x="457200" y="1005840"/>
-            <a:ext cx="11247120" cy="548640"/>
-          </a:xfrm>
-          <a:prstGeom prst="rect">
-            <a:avLst/>
-          </a:prstGeom>
-          <a:noFill/>
-        </p:spPr>
-        <p:txBody>
-          <a:bodyPr wrap="square" anchor="t" lIns="45720" rIns="45720">
-            <a:spAutoFit/>
-          </a:bodyPr>
-          <a:lstStyle/>
-          <a:p>
-            <a:pPr algn="l"/>
-            <a:r>
-              <a:rPr sz="1400" b="0">
-                <a:solidFill>
-                  <a:srgbClr val="666666"/>
-                </a:solidFill>
-                <a:latin typeface="Calibri"/>
-              </a:rPr>
-              <a:t>Pasos para aprobar una Solicitud de Compra:</a:t>
-            </a:r>
-          </a:p>
-        </p:txBody>
-      </p:sp>
-      <p:sp>
-        <p:nvSpPr>
-          <p:cNvPr id="6" name="TextBox 5"/>
-          <p:cNvSpPr txBox="1"/>
-          <p:nvPr/>
-        </p:nvSpPr>
-        <p:spPr>
-          <a:xfrm>
-            <a:off x="640080" y="1645920"/>
-            <a:ext cx="10972800" cy="4572000"/>
-          </a:xfrm>
-          <a:prstGeom prst="rect">
-            <a:avLst/>
-          </a:prstGeom>
-          <a:noFill/>
-        </p:spPr>
-        <p:txBody>
-          <a:bodyPr wrap="square">
-            <a:spAutoFit/>
-          </a:bodyPr>
-          <a:lstStyle/>
-          <a:p>
-            <a:pPr algn="l">
-              <a:lnSpc>
-                <a:spcPct val="150000"/>
-              </a:lnSpc>
-              <a:spcAft>
-                <a:spcPts val="1000"/>
-              </a:spcAft>
-            </a:pPr>
-            <a:r>
-              <a:rPr sz="2000" b="1">
-                <a:solidFill>
-                  <a:srgbClr val="0369A1"/>
-                </a:solidFill>
-                <a:latin typeface="Calibri"/>
-              </a:rPr>
-              <a:t>1.  </a:t>
-            </a:r>
-            <a:r>
-              <a:rPr sz="1600">
-                <a:solidFill>
-                  <a:srgbClr val="0F2040"/>
-                </a:solidFill>
-                <a:latin typeface="Calibri"/>
-              </a:rPr>
-              <a:t>Ve a Solicitud de Compras</a:t>
-            </a:r>
-          </a:p>
-          <a:p>
-            <a:pPr algn="l">
-              <a:lnSpc>
-                <a:spcPct val="150000"/>
-              </a:lnSpc>
-              <a:spcAft>
-                <a:spcPts val="1000"/>
-              </a:spcAft>
-            </a:pPr>
-            <a:r>
-              <a:rPr sz="2000" b="1">
-                <a:solidFill>
-                  <a:srgbClr val="0369A1"/>
-                </a:solidFill>
-                <a:latin typeface="Calibri"/>
-              </a:rPr>
-              <a:t>2.  </a:t>
-            </a:r>
-            <a:r>
-              <a:rPr sz="1600">
-                <a:solidFill>
-                  <a:srgbClr val="0F2040"/>
-                </a:solidFill>
-                <a:latin typeface="Calibri"/>
-              </a:rPr>
-              <a:t>Filtra por etapa "Pendiente Supervisor"</a:t>
-            </a:r>
-          </a:p>
-          <a:p>
-            <a:pPr algn="l">
-              <a:lnSpc>
-                <a:spcPct val="150000"/>
-              </a:lnSpc>
-              <a:spcAft>
-                <a:spcPts val="1000"/>
-              </a:spcAft>
-            </a:pPr>
-            <a:r>
-              <a:rPr sz="2000" b="1">
-                <a:solidFill>
-                  <a:srgbClr val="0369A1"/>
-                </a:solidFill>
-                <a:latin typeface="Calibri"/>
-              </a:rPr>
-              <a:t>3.  </a:t>
-            </a:r>
-            <a:r>
-              <a:rPr sz="1600">
-                <a:solidFill>
-                  <a:srgbClr val="0F2040"/>
-                </a:solidFill>
-                <a:latin typeface="Calibri"/>
-              </a:rPr>
-              <a:t>Revisa: materiales, cantidades, precios, justificación</a:t>
-            </a:r>
-          </a:p>
-          <a:p>
-            <a:pPr algn="l">
-              <a:lnSpc>
-                <a:spcPct val="150000"/>
-              </a:lnSpc>
-              <a:spcAft>
-                <a:spcPts val="1000"/>
-              </a:spcAft>
-            </a:pPr>
-            <a:r>
-              <a:rPr sz="2000" b="1">
-                <a:solidFill>
-                  <a:srgbClr val="0369A1"/>
-                </a:solidFill>
-                <a:latin typeface="Calibri"/>
-              </a:rPr>
-              <a:t>4.  </a:t>
-            </a:r>
-            <a:r>
-              <a:rPr sz="1600">
-                <a:solidFill>
-                  <a:srgbClr val="0F2040"/>
-                </a:solidFill>
-                <a:latin typeface="Calibri"/>
-              </a:rPr>
-              <a:t>Si procede: botón "Aprobar" (verde)</a:t>
-            </a:r>
-          </a:p>
-          <a:p>
-            <a:pPr algn="l">
-              <a:lnSpc>
-                <a:spcPct val="150000"/>
-              </a:lnSpc>
-              <a:spcAft>
-                <a:spcPts val="1000"/>
-              </a:spcAft>
-            </a:pPr>
-            <a:r>
-              <a:rPr sz="2000" b="1">
-                <a:solidFill>
-                  <a:srgbClr val="0369A1"/>
-                </a:solidFill>
-                <a:latin typeface="Calibri"/>
-              </a:rPr>
-              <a:t>5.  </a:t>
-            </a:r>
-            <a:r>
-              <a:rPr sz="1600">
-                <a:solidFill>
-                  <a:srgbClr val="0F2040"/>
-                </a:solidFill>
-                <a:latin typeface="Calibri"/>
-              </a:rPr>
-              <a:t>Si no procede: botón "Rechazar" (rojo) + motivo</a:t>
-            </a:r>
-          </a:p>
-          <a:p>
-            <a:pPr algn="l">
-              <a:lnSpc>
-                <a:spcPct val="150000"/>
-              </a:lnSpc>
-              <a:spcAft>
-                <a:spcPts val="1000"/>
-              </a:spcAft>
-            </a:pPr>
-            <a:r>
-              <a:rPr sz="2000" b="1">
-                <a:solidFill>
-                  <a:srgbClr val="0369A1"/>
-                </a:solidFill>
-                <a:latin typeface="Calibri"/>
-              </a:rPr>
-              <a:t>6.  </a:t>
-            </a:r>
-            <a:r>
-              <a:rPr sz="1600">
-                <a:solidFill>
-                  <a:srgbClr val="0F2040"/>
-                </a:solidFill>
-                <a:latin typeface="Calibri"/>
-              </a:rPr>
-              <a:t>Al aprobar → se notifica automáticamente al admin</a:t>
-            </a:r>
-          </a:p>
-          <a:p>
-            <a:pPr algn="l">
-              <a:lnSpc>
-                <a:spcPct val="150000"/>
-              </a:lnSpc>
-              <a:spcAft>
-                <a:spcPts val="1000"/>
-              </a:spcAft>
-            </a:pPr>
-            <a:r>
-              <a:rPr sz="2000" b="1">
-                <a:solidFill>
-                  <a:srgbClr val="0369A1"/>
-                </a:solidFill>
-                <a:latin typeface="Calibri"/>
-              </a:rPr>
-              <a:t>7.  </a:t>
-            </a:r>
-            <a:r>
-              <a:rPr sz="1600">
-                <a:solidFill>
-                  <a:srgbClr val="0F2040"/>
-                </a:solidFill>
-                <a:latin typeface="Calibri"/>
-              </a:rPr>
-              <a:t>El admin verá la SC en etapa "Aprobada Supervisor"</a:t>
-            </a:r>
-          </a:p>
-        </p:txBody>
-      </p:sp>
-      <p:sp>
-        <p:nvSpPr>
-          <p:cNvPr id="7" name="Rectangle 6"/>
+          <p:cNvPr id="5" name="Rounded Rectangle 4"/>
           <p:cNvSpPr/>
           <p:nvPr/>
         </p:nvSpPr>
         <p:spPr>
           <a:xfrm>
-            <a:off x="0" y="6583680"/>
-            <a:ext cx="12191695" cy="274320"/>
-          </a:xfrm>
-          <a:prstGeom prst="rect">
+            <a:off x="914400" y="1828800"/>
+            <a:ext cx="10332720" cy="3200400"/>
+          </a:xfrm>
+          <a:prstGeom prst="roundRect">
             <a:avLst/>
           </a:prstGeom>
           <a:solidFill>
-            <a:srgbClr val="0F2040"/>
+            <a:srgbClr val="F1F5F9"/>
           </a:solidFill>
           <a:ln>
             <a:noFill/>
@@ -6640,14 +6578,58 @@
       </p:sp>
       <p:sp>
         <p:nvSpPr>
-          <p:cNvPr id="8" name="TextBox 7"/>
+          <p:cNvPr id="6" name="Rectangle 5"/>
+          <p:cNvSpPr/>
+          <p:nvPr/>
+        </p:nvSpPr>
+        <p:spPr>
+          <a:xfrm>
+            <a:off x="914400" y="1828800"/>
+            <a:ext cx="137160" cy="3200400"/>
+          </a:xfrm>
+          <a:prstGeom prst="rect">
+            <a:avLst/>
+          </a:prstGeom>
+          <a:solidFill>
+            <a:srgbClr val="F59E0B"/>
+          </a:solidFill>
+          <a:ln>
+            <a:noFill/>
+          </a:ln>
+          <a:effectLst/>
+        </p:spPr>
+        <p:style>
+          <a:lnRef idx="1">
+            <a:schemeClr val="accent1"/>
+          </a:lnRef>
+          <a:fillRef idx="3">
+            <a:schemeClr val="accent1"/>
+          </a:fillRef>
+          <a:effectRef idx="2">
+            <a:schemeClr val="accent1"/>
+          </a:effectRef>
+          <a:fontRef idx="minor">
+            <a:schemeClr val="lt1"/>
+          </a:fontRef>
+        </p:style>
+        <p:txBody>
+          <a:bodyPr rtlCol="0" anchor="ctr"/>
+          <a:lstStyle/>
+          <a:p>
+            <a:pPr algn="ctr"/>
+          </a:p>
+        </p:txBody>
+      </p:sp>
+      <p:sp>
+        <p:nvSpPr>
+          <p:cNvPr id="7" name="TextBox 6"/>
           <p:cNvSpPr txBox="1"/>
           <p:nvPr/>
         </p:nvSpPr>
         <p:spPr>
           <a:xfrm>
-            <a:off x="365760" y="6583680"/>
-            <a:ext cx="6400800" cy="274320"/>
+            <a:off x="1371600" y="2103120"/>
+            <a:ext cx="1828800" cy="1828800"/>
           </a:xfrm>
           <a:prstGeom prst="rect">
             <a:avLst/>
@@ -6660,8 +6642,122 @@
           </a:bodyPr>
           <a:lstStyle/>
           <a:p>
+            <a:pPr algn="ctr"/>
+            <a:r>
+              <a:rPr sz="8000" b="0">
+                <a:solidFill>
+                  <a:srgbClr val="F59E0B"/>
+                </a:solidFill>
+                <a:latin typeface="Calibri"/>
+              </a:rPr>
+              <a:t>⚠️</a:t>
+            </a:r>
+          </a:p>
+        </p:txBody>
+      </p:sp>
+      <p:sp>
+        <p:nvSpPr>
+          <p:cNvPr id="8" name="TextBox 7"/>
+          <p:cNvSpPr txBox="1"/>
+          <p:nvPr/>
+        </p:nvSpPr>
+        <p:spPr>
+          <a:xfrm>
+            <a:off x="3474720" y="2103120"/>
+            <a:ext cx="7498079" cy="2743200"/>
+          </a:xfrm>
+          <a:prstGeom prst="rect">
+            <a:avLst/>
+          </a:prstGeom>
+          <a:noFill/>
+        </p:spPr>
+        <p:txBody>
+          <a:bodyPr wrap="square" anchor="ctr" lIns="45720" rIns="45720">
+            <a:spAutoFit/>
+          </a:bodyPr>
+          <a:lstStyle/>
+          <a:p>
             <a:pPr algn="l"/>
             <a:r>
+              <a:rPr sz="1800" b="0">
+                <a:solidFill>
+                  <a:srgbClr val="0F2040"/>
+                </a:solidFill>
+                <a:latin typeface="Calibri"/>
+              </a:rPr>
+              <a:t>Las Solicitudes de Compra que TÚ creas también pasan por el flujo de aprobación. Como supervisor, no puedes auto-aprobar tus propias SC. Esto evita conflictos de interés.</a:t>
+            </a:r>
+          </a:p>
+        </p:txBody>
+      </p:sp>
+      <p:sp>
+        <p:nvSpPr>
+          <p:cNvPr id="9" name="Rectangle 8"/>
+          <p:cNvSpPr/>
+          <p:nvPr/>
+        </p:nvSpPr>
+        <p:spPr>
+          <a:xfrm>
+            <a:off x="0" y="6583680"/>
+            <a:ext cx="12191695" cy="274320"/>
+          </a:xfrm>
+          <a:prstGeom prst="rect">
+            <a:avLst/>
+          </a:prstGeom>
+          <a:solidFill>
+            <a:srgbClr val="0F2040"/>
+          </a:solidFill>
+          <a:ln>
+            <a:noFill/>
+          </a:ln>
+          <a:effectLst/>
+        </p:spPr>
+        <p:style>
+          <a:lnRef idx="1">
+            <a:schemeClr val="accent1"/>
+          </a:lnRef>
+          <a:fillRef idx="3">
+            <a:schemeClr val="accent1"/>
+          </a:fillRef>
+          <a:effectRef idx="2">
+            <a:schemeClr val="accent1"/>
+          </a:effectRef>
+          <a:fontRef idx="minor">
+            <a:schemeClr val="lt1"/>
+          </a:fontRef>
+        </p:style>
+        <p:txBody>
+          <a:bodyPr rtlCol="0" anchor="ctr"/>
+          <a:lstStyle/>
+          <a:p>
+            <a:pPr algn="ctr"/>
+          </a:p>
+        </p:txBody>
+      </p:sp>
+      <p:sp>
+        <p:nvSpPr>
+          <p:cNvPr id="10" name="TextBox 9"/>
+          <p:cNvSpPr txBox="1"/>
+          <p:nvPr/>
+        </p:nvSpPr>
+        <p:spPr>
+          <a:xfrm>
+            <a:off x="365760" y="6583680"/>
+            <a:ext cx="6400800" cy="274320"/>
+          </a:xfrm>
+          <a:prstGeom prst="rect">
+            <a:avLst/>
+          </a:prstGeom>
+          <a:noFill/>
+        </p:spPr>
+        <p:txBody>
+          <a:bodyPr wrap="square" anchor="ctr" lIns="45720" rIns="45720">
+            <a:spAutoFit/>
+          </a:bodyPr>
+          <a:lstStyle/>
+          <a:p>
+            <a:pPr algn="l"/>
+            <a:r>
               <a:rPr sz="900" b="0">
                 <a:solidFill>
                   <a:srgbClr val="FFFFFF"/>
@@ -6675,7 +6771,7 @@
       </p:sp>
       <p:sp>
         <p:nvSpPr>
-          <p:cNvPr id="9" name="TextBox 8"/>
+          <p:cNvPr id="11" name="TextBox 10"/>
           <p:cNvSpPr txBox="1"/>
           <p:nvPr/>
         </p:nvSpPr>
@@ -6808,7 +6904,7 @@
                 </a:solidFill>
                 <a:latin typeface="Calibri"/>
               </a:rPr>
-              <a:t>Flujo: Aprobar OT Completada</a:t>
+              <a:t>Órdenes de Trabajo</a:t>
             </a:r>
           </a:p>
         </p:txBody>
@@ -6848,16 +6944,40 @@
           </a:p>
         </p:txBody>
       </p:sp>
-      <p:sp>
-        <p:nvSpPr>
-          <p:cNvPr id="5" name="TextBox 4"/>
+      <p:pic>
+        <p:nvPicPr>
+          <p:cNvPr id="5" name="Picture 4" descr="03_ot_listado.png"/>
+          <p:cNvPicPr>
+            <a:picLocks noChangeAspect="1"/>
+          </p:cNvPicPr>
+          <p:nvPr/>
+        </p:nvPicPr>
+        <p:blipFill>
+          <a:blip r:embed="rId2"/>
+          <a:stretch>
+            <a:fillRect/>
+          </a:stretch>
+        </p:blipFill>
+        <p:spPr>
+          <a:xfrm>
+            <a:off x="1386687" y="1097280"/>
+            <a:ext cx="9418320" cy="5886450"/>
+          </a:xfrm>
+          <a:prstGeom prst="rect">
+            <a:avLst/>
+          </a:prstGeom>
+        </p:spPr>
+      </p:pic>
+      <p:sp>
+        <p:nvSpPr>
+          <p:cNvPr id="6" name="TextBox 5"/>
           <p:cNvSpPr txBox="1"/>
           <p:nvPr/>
         </p:nvSpPr>
         <p:spPr>
           <a:xfrm>
-            <a:off x="457200" y="1005840"/>
-            <a:ext cx="11247120" cy="548640"/>
+            <a:off x="914400" y="6035040"/>
+            <a:ext cx="10332720" cy="457200"/>
           </a:xfrm>
           <a:prstGeom prst="rect">
             <a:avLst/>
@@ -6865,239 +6985,20 @@
           <a:noFill/>
         </p:spPr>
         <p:txBody>
-          <a:bodyPr wrap="square" anchor="t" lIns="45720" rIns="45720">
+          <a:bodyPr wrap="square" anchor="ctr" lIns="45720" rIns="45720">
             <a:spAutoFit/>
           </a:bodyPr>
           <a:lstStyle/>
           <a:p>
-            <a:pPr algn="l"/>
-            <a:r>
-              <a:rPr sz="1400" b="0">
+            <a:pPr algn="ctr"/>
+            <a:r>
+              <a:rPr sz="1200" b="0">
                 <a:solidFill>
                   <a:srgbClr val="666666"/>
                 </a:solidFill>
                 <a:latin typeface="Calibri"/>
               </a:rPr>
-              <a:t>Tú también puedes aprobar OT (junto con el admin):</a:t>
-            </a:r>
-          </a:p>
-        </p:txBody>
-      </p:sp>
-      <p:sp>
-        <p:nvSpPr>
-          <p:cNvPr id="6" name="TextBox 5"/>
-          <p:cNvSpPr txBox="1"/>
-          <p:nvPr/>
-        </p:nvSpPr>
-        <p:spPr>
-          <a:xfrm>
-            <a:off x="640080" y="1645920"/>
-            <a:ext cx="10972800" cy="4572000"/>
-          </a:xfrm>
-          <a:prstGeom prst="rect">
-            <a:avLst/>
-          </a:prstGeom>
-          <a:noFill/>
-        </p:spPr>
-        <p:txBody>
-          <a:bodyPr wrap="square">
-            <a:spAutoFit/>
-          </a:bodyPr>
-          <a:lstStyle/>
-          <a:p>
-            <a:pPr algn="l">
-              <a:lnSpc>
-                <a:spcPct val="150000"/>
-              </a:lnSpc>
-              <a:spcAft>
-                <a:spcPts val="1000"/>
-              </a:spcAft>
-            </a:pPr>
-            <a:r>
-              <a:rPr sz="2000" b="1">
-                <a:solidFill>
-                  <a:srgbClr val="0369A1"/>
-                </a:solidFill>
-                <a:latin typeface="Calibri"/>
-              </a:rPr>
-              <a:t>1.  </a:t>
-            </a:r>
-            <a:r>
-              <a:rPr sz="1600">
-                <a:solidFill>
-                  <a:srgbClr val="0F2040"/>
-                </a:solidFill>
-                <a:latin typeface="Calibri"/>
-              </a:rPr>
-              <a:t>Ve a Aprobaciones OT</a:t>
-            </a:r>
-          </a:p>
-          <a:p>
-            <a:pPr algn="l">
-              <a:lnSpc>
-                <a:spcPct val="150000"/>
-              </a:lnSpc>
-              <a:spcAft>
-                <a:spcPts val="1000"/>
-              </a:spcAft>
-            </a:pPr>
-            <a:r>
-              <a:rPr sz="2000" b="1">
-                <a:solidFill>
-                  <a:srgbClr val="0369A1"/>
-                </a:solidFill>
-                <a:latin typeface="Calibri"/>
-              </a:rPr>
-              <a:t>2.  </a:t>
-            </a:r>
-            <a:r>
-              <a:rPr sz="1600">
-                <a:solidFill>
-                  <a:srgbClr val="0F2040"/>
-                </a:solidFill>
-                <a:latin typeface="Calibri"/>
-              </a:rPr>
-              <a:t>Verás OTs completadas pendientes de aprobación</a:t>
-            </a:r>
-          </a:p>
-          <a:p>
-            <a:pPr algn="l">
-              <a:lnSpc>
-                <a:spcPct val="150000"/>
-              </a:lnSpc>
-              <a:spcAft>
-                <a:spcPts val="1000"/>
-              </a:spcAft>
-            </a:pPr>
-            <a:r>
-              <a:rPr sz="2000" b="1">
-                <a:solidFill>
-                  <a:srgbClr val="0369A1"/>
-                </a:solidFill>
-                <a:latin typeface="Calibri"/>
-              </a:rPr>
-              <a:t>3.  </a:t>
-            </a:r>
-            <a:r>
-              <a:rPr sz="1600">
-                <a:solidFill>
-                  <a:srgbClr val="0F2040"/>
-                </a:solidFill>
-                <a:latin typeface="Calibri"/>
-              </a:rPr>
-              <a:t>Haz clic para revisar el detalle completo</a:t>
-            </a:r>
-          </a:p>
-          <a:p>
-            <a:pPr algn="l">
-              <a:lnSpc>
-                <a:spcPct val="150000"/>
-              </a:lnSpc>
-              <a:spcAft>
-                <a:spcPts val="1000"/>
-              </a:spcAft>
-            </a:pPr>
-            <a:r>
-              <a:rPr sz="2000" b="1">
-                <a:solidFill>
-                  <a:srgbClr val="0369A1"/>
-                </a:solidFill>
-                <a:latin typeface="Calibri"/>
-              </a:rPr>
-              <a:t>4.  </a:t>
-            </a:r>
-            <a:r>
-              <a:rPr sz="1600">
-                <a:solidFill>
-                  <a:srgbClr val="0F2040"/>
-                </a:solidFill>
-                <a:latin typeface="Calibri"/>
-              </a:rPr>
-              <a:t>Verifica: materiales usados, tareas, fotos, personal</a:t>
-            </a:r>
-          </a:p>
-          <a:p>
-            <a:pPr algn="l">
-              <a:lnSpc>
-                <a:spcPct val="150000"/>
-              </a:lnSpc>
-              <a:spcAft>
-                <a:spcPts val="1000"/>
-              </a:spcAft>
-            </a:pPr>
-            <a:r>
-              <a:rPr sz="2000" b="1">
-                <a:solidFill>
-                  <a:srgbClr val="0369A1"/>
-                </a:solidFill>
-                <a:latin typeface="Calibri"/>
-              </a:rPr>
-              <a:t>5.  </a:t>
-            </a:r>
-            <a:r>
-              <a:rPr sz="1600">
-                <a:solidFill>
-                  <a:srgbClr val="0F2040"/>
-                </a:solidFill>
-                <a:latin typeface="Calibri"/>
-              </a:rPr>
-              <a:t>Si está correcto: "Aprobar"</a:t>
-            </a:r>
-          </a:p>
-          <a:p>
-            <a:pPr algn="l">
-              <a:lnSpc>
-                <a:spcPct val="150000"/>
-              </a:lnSpc>
-              <a:spcAft>
-                <a:spcPts val="1000"/>
-              </a:spcAft>
-            </a:pPr>
-            <a:r>
-              <a:rPr sz="2000" b="1">
-                <a:solidFill>
-                  <a:srgbClr val="0369A1"/>
-                </a:solidFill>
-                <a:latin typeface="Calibri"/>
-              </a:rPr>
-              <a:t>6.  </a:t>
-            </a:r>
-            <a:r>
-              <a:rPr sz="1600">
-                <a:solidFill>
-                  <a:srgbClr val="0F2040"/>
-                </a:solidFill>
-                <a:latin typeface="Calibri"/>
-              </a:rPr>
-              <a:t>Si hay problemas: "Rechazar" + motivo</a:t>
-            </a:r>
-          </a:p>
-          <a:p>
-            <a:pPr algn="l">
-              <a:lnSpc>
-                <a:spcPct val="150000"/>
-              </a:lnSpc>
-              <a:spcAft>
-                <a:spcPts val="1000"/>
-              </a:spcAft>
-            </a:pPr>
-            <a:r>
-              <a:rPr sz="2000" b="1">
-                <a:solidFill>
-                  <a:srgbClr val="0369A1"/>
-                </a:solidFill>
-                <a:latin typeface="Calibri"/>
-              </a:rPr>
-              <a:t>7.  </a:t>
-            </a:r>
-            <a:r>
-              <a:rPr sz="1600">
-                <a:solidFill>
-                  <a:srgbClr val="0F2040"/>
-                </a:solidFill>
-                <a:latin typeface="Calibri"/>
-              </a:rPr>
-              <a:t>El trabajador verá la decisión y actuará en consecuencia</a:t>
+              <a:t>Listado de OT — el supervisor puede crear, editar y aprobar</a:t>
             </a:r>
           </a:p>
         </p:txBody>
@@ -7316,7 +7217,7 @@
                 </a:solidFill>
                 <a:latin typeface="Calibri"/>
               </a:rPr>
-              <a:t>Importante: SC que tú creas</a:t>
+              <a:t>Flujo: Aprobar OT Completada</a:t>
             </a:r>
           </a:p>
         </p:txBody>
@@ -7358,20 +7259,234 @@
       </p:sp>
       <p:sp>
         <p:nvSpPr>
-          <p:cNvPr id="5" name="Rounded Rectangle 4"/>
+          <p:cNvPr id="5" name="TextBox 4"/>
+          <p:cNvSpPr txBox="1"/>
+          <p:nvPr/>
+        </p:nvSpPr>
+        <p:spPr>
+          <a:xfrm>
+            <a:off x="457200" y="1005840"/>
+            <a:ext cx="11247120" cy="548640"/>
+          </a:xfrm>
+          <a:prstGeom prst="rect">
+            <a:avLst/>
+          </a:prstGeom>
+          <a:noFill/>
+        </p:spPr>
+        <p:txBody>
+          <a:bodyPr wrap="square" anchor="t" lIns="45720" rIns="45720">
+            <a:spAutoFit/>
+          </a:bodyPr>
+          <a:lstStyle/>
+          <a:p>
+            <a:pPr algn="l"/>
+            <a:r>
+              <a:rPr sz="1400" b="0">
+                <a:solidFill>
+                  <a:srgbClr val="666666"/>
+                </a:solidFill>
+                <a:latin typeface="Calibri"/>
+              </a:rPr>
+              <a:t>Tú también puedes aprobar OT:</a:t>
+            </a:r>
+          </a:p>
+        </p:txBody>
+      </p:sp>
+      <p:sp>
+        <p:nvSpPr>
+          <p:cNvPr id="6" name="TextBox 5"/>
+          <p:cNvSpPr txBox="1"/>
+          <p:nvPr/>
+        </p:nvSpPr>
+        <p:spPr>
+          <a:xfrm>
+            <a:off x="640080" y="1645920"/>
+            <a:ext cx="10972800" cy="4572000"/>
+          </a:xfrm>
+          <a:prstGeom prst="rect">
+            <a:avLst/>
+          </a:prstGeom>
+          <a:noFill/>
+        </p:spPr>
+        <p:txBody>
+          <a:bodyPr wrap="square">
+            <a:spAutoFit/>
+          </a:bodyPr>
+          <a:lstStyle/>
+          <a:p>
+            <a:pPr algn="l">
+              <a:lnSpc>
+                <a:spcPct val="150000"/>
+              </a:lnSpc>
+              <a:spcAft>
+                <a:spcPts val="1000"/>
+              </a:spcAft>
+            </a:pPr>
+            <a:r>
+              <a:rPr sz="2000" b="1">
+                <a:solidFill>
+                  <a:srgbClr val="0369A1"/>
+                </a:solidFill>
+              </a:rPr>
+              <a:t>1.  </a:t>
+            </a:r>
+            <a:r>
+              <a:rPr sz="1600">
+                <a:solidFill>
+                  <a:srgbClr val="0F2040"/>
+                </a:solidFill>
+              </a:rPr>
+              <a:t>Ve a Aprobaciones OT</a:t>
+            </a:r>
+          </a:p>
+          <a:p>
+            <a:pPr algn="l">
+              <a:lnSpc>
+                <a:spcPct val="150000"/>
+              </a:lnSpc>
+              <a:spcAft>
+                <a:spcPts val="1000"/>
+              </a:spcAft>
+            </a:pPr>
+            <a:r>
+              <a:rPr sz="2000" b="1">
+                <a:solidFill>
+                  <a:srgbClr val="0369A1"/>
+                </a:solidFill>
+              </a:rPr>
+              <a:t>2.  </a:t>
+            </a:r>
+            <a:r>
+              <a:rPr sz="1600">
+                <a:solidFill>
+                  <a:srgbClr val="0F2040"/>
+                </a:solidFill>
+              </a:rPr>
+              <a:t>Verás OTs completadas pendientes de aprobación</a:t>
+            </a:r>
+          </a:p>
+          <a:p>
+            <a:pPr algn="l">
+              <a:lnSpc>
+                <a:spcPct val="150000"/>
+              </a:lnSpc>
+              <a:spcAft>
+                <a:spcPts val="1000"/>
+              </a:spcAft>
+            </a:pPr>
+            <a:r>
+              <a:rPr sz="2000" b="1">
+                <a:solidFill>
+                  <a:srgbClr val="0369A1"/>
+                </a:solidFill>
+              </a:rPr>
+              <a:t>3.  </a:t>
+            </a:r>
+            <a:r>
+              <a:rPr sz="1600">
+                <a:solidFill>
+                  <a:srgbClr val="0F2040"/>
+                </a:solidFill>
+              </a:rPr>
+              <a:t>Haz clic para revisar el detalle completo</a:t>
+            </a:r>
+          </a:p>
+          <a:p>
+            <a:pPr algn="l">
+              <a:lnSpc>
+                <a:spcPct val="150000"/>
+              </a:lnSpc>
+              <a:spcAft>
+                <a:spcPts val="1000"/>
+              </a:spcAft>
+            </a:pPr>
+            <a:r>
+              <a:rPr sz="2000" b="1">
+                <a:solidFill>
+                  <a:srgbClr val="0369A1"/>
+                </a:solidFill>
+              </a:rPr>
+              <a:t>4.  </a:t>
+            </a:r>
+            <a:r>
+              <a:rPr sz="1600">
+                <a:solidFill>
+                  <a:srgbClr val="0F2040"/>
+                </a:solidFill>
+              </a:rPr>
+              <a:t>Verifica: materiales usados, tareas, fotos, personal</a:t>
+            </a:r>
+          </a:p>
+          <a:p>
+            <a:pPr algn="l">
+              <a:lnSpc>
+                <a:spcPct val="150000"/>
+              </a:lnSpc>
+              <a:spcAft>
+                <a:spcPts val="1000"/>
+              </a:spcAft>
+            </a:pPr>
+            <a:r>
+              <a:rPr sz="2000" b="1">
+                <a:solidFill>
+                  <a:srgbClr val="0369A1"/>
+                </a:solidFill>
+              </a:rPr>
+              <a:t>5.  </a:t>
+            </a:r>
+            <a:r>
+              <a:rPr sz="1600">
+                <a:solidFill>
+                  <a:srgbClr val="0F2040"/>
+                </a:solidFill>
+              </a:rPr>
+              <a:t>Si está correcto: "Aprobar"</a:t>
+            </a:r>
+          </a:p>
+          <a:p>
+            <a:pPr algn="l">
+              <a:lnSpc>
+                <a:spcPct val="150000"/>
+              </a:lnSpc>
+              <a:spcAft>
+                <a:spcPts val="1000"/>
+              </a:spcAft>
+            </a:pPr>
+            <a:r>
+              <a:rPr sz="2000" b="1">
+                <a:solidFill>
+                  <a:srgbClr val="0369A1"/>
+                </a:solidFill>
+              </a:rPr>
+              <a:t>6.  </a:t>
+            </a:r>
+            <a:r>
+              <a:rPr sz="1600">
+                <a:solidFill>
+                  <a:srgbClr val="0F2040"/>
+                </a:solidFill>
+              </a:rPr>
+              <a:t>Si hay problemas: "Rechazar" + motivo</a:t>
+            </a:r>
+          </a:p>
+        </p:txBody>
+      </p:sp>
+      <p:sp>
+        <p:nvSpPr>
+          <p:cNvPr id="7" name="Rectangle 6"/>
           <p:cNvSpPr/>
           <p:nvPr/>
         </p:nvSpPr>
         <p:spPr>
           <a:xfrm>
-            <a:off x="914400" y="1828800"/>
-            <a:ext cx="10332720" cy="3200400"/>
-          </a:xfrm>
-          <a:prstGeom prst="roundRect">
+            <a:off x="0" y="6583680"/>
+            <a:ext cx="12191695" cy="274320"/>
+          </a:xfrm>
+          <a:prstGeom prst="rect">
             <a:avLst/>
           </a:prstGeom>
           <a:solidFill>
-            <a:srgbClr val="F1F5F9"/>
+            <a:srgbClr val="0F2040"/>
           </a:solidFill>
           <a:ln>
             <a:noFill/>
@@ -7402,58 +7517,14 @@
       </p:sp>
       <p:sp>
         <p:nvSpPr>
-          <p:cNvPr id="6" name="Rectangle 5"/>
-          <p:cNvSpPr/>
-          <p:nvPr/>
-        </p:nvSpPr>
-        <p:spPr>
-          <a:xfrm>
-            <a:off x="914400" y="1828800"/>
-            <a:ext cx="137160" cy="3200400"/>
-          </a:xfrm>
-          <a:prstGeom prst="rect">
-            <a:avLst/>
-          </a:prstGeom>
-          <a:solidFill>
-            <a:srgbClr val="F59E0B"/>
-          </a:solidFill>
-          <a:ln>
-            <a:noFill/>
-          </a:ln>
-          <a:effectLst/>
-        </p:spPr>
-        <p:style>
-          <a:lnRef idx="1">
-            <a:schemeClr val="accent1"/>
-          </a:lnRef>
-          <a:fillRef idx="3">
-            <a:schemeClr val="accent1"/>
-          </a:fillRef>
-          <a:effectRef idx="2">
-            <a:schemeClr val="accent1"/>
-          </a:effectRef>
-          <a:fontRef idx="minor">
-            <a:schemeClr val="lt1"/>
-          </a:fontRef>
-        </p:style>
-        <p:txBody>
-          <a:bodyPr rtlCol="0" anchor="ctr"/>
-          <a:lstStyle/>
-          <a:p>
-            <a:pPr algn="ctr"/>
-          </a:p>
-        </p:txBody>
-      </p:sp>
-      <p:sp>
-        <p:nvSpPr>
-          <p:cNvPr id="7" name="TextBox 6"/>
+          <p:cNvPr id="8" name="TextBox 7"/>
           <p:cNvSpPr txBox="1"/>
           <p:nvPr/>
         </p:nvSpPr>
         <p:spPr>
           <a:xfrm>
-            <a:off x="1371600" y="2103120"/>
-            <a:ext cx="1828800" cy="1828800"/>
+            <a:off x="365760" y="6583680"/>
+            <a:ext cx="6400800" cy="274320"/>
           </a:xfrm>
           <a:prstGeom prst="rect">
             <a:avLst/>
@@ -7466,128 +7537,14 @@
           </a:bodyPr>
           <a:lstStyle/>
           <a:p>
-            <a:pPr algn="ctr"/>
-            <a:r>
-              <a:rPr sz="8000" b="0">
-                <a:solidFill>
-                  <a:srgbClr val="F59E0B"/>
+            <a:pPr algn="l"/>
+            <a:r>
+              <a:rPr sz="900" b="0">
+                <a:solidFill>
+                  <a:srgbClr val="FFFFFF"/>
                 </a:solidFill>
                 <a:latin typeface="Calibri"/>
               </a:rPr>
-              <a:t>⚠️</a:t>
-            </a:r>
-          </a:p>
-        </p:txBody>
-      </p:sp>
-      <p:sp>
-        <p:nvSpPr>
-          <p:cNvPr id="8" name="TextBox 7"/>
-          <p:cNvSpPr txBox="1"/>
-          <p:nvPr/>
-        </p:nvSpPr>
-        <p:spPr>
-          <a:xfrm>
-            <a:off x="3474720" y="2103120"/>
-            <a:ext cx="7498079" cy="2743200"/>
-          </a:xfrm>
-          <a:prstGeom prst="rect">
-            <a:avLst/>
-          </a:prstGeom>
-          <a:noFill/>
-        </p:spPr>
-        <p:txBody>
-          <a:bodyPr wrap="square" anchor="ctr" lIns="45720" rIns="45720">
-            <a:spAutoFit/>
-          </a:bodyPr>
-          <a:lstStyle/>
-          <a:p>
-            <a:pPr algn="l"/>
-            <a:r>
-              <a:rPr sz="1800" b="0">
-                <a:solidFill>
-                  <a:srgbClr val="0F2040"/>
-                </a:solidFill>
-                <a:latin typeface="Calibri"/>
-              </a:rPr>
-              <a:t>Las Solicitudes de Compra que TÚ creas también pasan por el flujo de aprobación. Como supervisor, no puedes auto-aprobar tus propias SC (otro supervisor o el admin debe aprobarlas). Esto evita conflictos de interés.</a:t>
-            </a:r>
-          </a:p>
-        </p:txBody>
-      </p:sp>
-      <p:sp>
-        <p:nvSpPr>
-          <p:cNvPr id="9" name="Rectangle 8"/>
-          <p:cNvSpPr/>
-          <p:nvPr/>
-        </p:nvSpPr>
-        <p:spPr>
-          <a:xfrm>
-            <a:off x="0" y="6583680"/>
-            <a:ext cx="12191695" cy="274320"/>
-          </a:xfrm>
-          <a:prstGeom prst="rect">
-            <a:avLst/>
-          </a:prstGeom>
-          <a:solidFill>
-            <a:srgbClr val="0F2040"/>
-          </a:solidFill>
-          <a:ln>
-            <a:noFill/>
-          </a:ln>
-          <a:effectLst/>
-        </p:spPr>
-        <p:style>
-          <a:lnRef idx="1">
-            <a:schemeClr val="accent1"/>
-          </a:lnRef>
-          <a:fillRef idx="3">
-            <a:schemeClr val="accent1"/>
-          </a:fillRef>
-          <a:effectRef idx="2">
-            <a:schemeClr val="accent1"/>
-          </a:effectRef>
-          <a:fontRef idx="minor">
-            <a:schemeClr val="lt1"/>
-          </a:fontRef>
-        </p:style>
-        <p:txBody>
-          <a:bodyPr rtlCol="0" anchor="ctr"/>
-          <a:lstStyle/>
-          <a:p>
-            <a:pPr algn="ctr"/>
-          </a:p>
-        </p:txBody>
-      </p:sp>
-      <p:sp>
-        <p:nvSpPr>
-          <p:cNvPr id="10" name="TextBox 9"/>
-          <p:cNvSpPr txBox="1"/>
-          <p:nvPr/>
-        </p:nvSpPr>
-        <p:spPr>
-          <a:xfrm>
-            <a:off x="365760" y="6583680"/>
-            <a:ext cx="6400800" cy="274320"/>
-          </a:xfrm>
-          <a:prstGeom prst="rect">
-            <a:avLst/>
-          </a:prstGeom>
-          <a:noFill/>
-        </p:spPr>
-        <p:txBody>
-          <a:bodyPr wrap="square" anchor="ctr" lIns="45720" rIns="45720">
-            <a:spAutoFit/>
-          </a:bodyPr>
-          <a:lstStyle/>
-          <a:p>
-            <a:pPr algn="l"/>
-            <a:r>
-              <a:rPr sz="900" b="0">
-                <a:solidFill>
-                  <a:srgbClr val="FFFFFF"/>
-                </a:solidFill>
-                <a:latin typeface="Calibri"/>
-              </a:rPr>
               <a:t>Asesorías Integrales CyJ · Capacitación Supervisor</a:t>
             </a:r>
           </a:p>
@@ -7595,7 +7552,7 @@
       </p:sp>
       <p:sp>
         <p:nvSpPr>
-          <p:cNvPr id="11" name="TextBox 10"/>
+          <p:cNvPr id="9" name="TextBox 8"/>
           <p:cNvSpPr txBox="1"/>
           <p:nvPr/>
         </p:nvSpPr>
@@ -7728,7 +7685,7 @@
                 </a:solidFill>
                 <a:latin typeface="Calibri"/>
               </a:rPr>
-              <a:t>No puedes hacer</a:t>
+              <a:t>Módulo Proyectos</a:t>
             </a:r>
           </a:p>
         </p:txBody>
@@ -7768,16 +7725,40 @@
           </a:p>
         </p:txBody>
       </p:sp>
-      <p:sp>
-        <p:nvSpPr>
-          <p:cNvPr id="5" name="TextBox 4"/>
+      <p:pic>
+        <p:nvPicPr>
+          <p:cNvPr id="5" name="Picture 4" descr="04_proyectos.png"/>
+          <p:cNvPicPr>
+            <a:picLocks noChangeAspect="1"/>
+          </p:cNvPicPr>
+          <p:nvPr/>
+        </p:nvPicPr>
+        <p:blipFill>
+          <a:blip r:embed="rId2"/>
+          <a:stretch>
+            <a:fillRect/>
+          </a:stretch>
+        </p:blipFill>
+        <p:spPr>
+          <a:xfrm>
+            <a:off x="1386687" y="1097280"/>
+            <a:ext cx="9418320" cy="5886450"/>
+          </a:xfrm>
+          <a:prstGeom prst="rect">
+            <a:avLst/>
+          </a:prstGeom>
+        </p:spPr>
+      </p:pic>
+      <p:sp>
+        <p:nvSpPr>
+          <p:cNvPr id="6" name="TextBox 5"/>
           <p:cNvSpPr txBox="1"/>
           <p:nvPr/>
         </p:nvSpPr>
         <p:spPr>
           <a:xfrm>
-            <a:off x="457200" y="1005840"/>
-            <a:ext cx="11247120" cy="731520"/>
+            <a:off x="914400" y="6035040"/>
+            <a:ext cx="10332720" cy="457200"/>
           </a:xfrm>
           <a:prstGeom prst="rect">
             <a:avLst/>
@@ -7785,295 +7766,20 @@
           <a:noFill/>
         </p:spPr>
         <p:txBody>
-          <a:bodyPr wrap="square" anchor="t" lIns="45720" rIns="45720">
+          <a:bodyPr wrap="square" anchor="ctr" lIns="45720" rIns="45720">
             <a:spAutoFit/>
           </a:bodyPr>
           <a:lstStyle/>
           <a:p>
-            <a:pPr algn="l"/>
-            <a:r>
-              <a:rPr sz="1400" b="0">
+            <a:pPr algn="ctr"/>
+            <a:r>
+              <a:rPr sz="1200" b="0">
                 <a:solidFill>
                   <a:srgbClr val="666666"/>
                 </a:solidFill>
                 <a:latin typeface="Calibri"/>
               </a:rPr>
-              <a:t>Limitaciones del rol Supervisor (por diseño):</a:t>
-            </a:r>
-          </a:p>
-        </p:txBody>
-      </p:sp>
-      <p:sp>
-        <p:nvSpPr>
-          <p:cNvPr id="6" name="TextBox 5"/>
-          <p:cNvSpPr txBox="1"/>
-          <p:nvPr/>
-        </p:nvSpPr>
-        <p:spPr>
-          <a:xfrm>
-            <a:off x="640080" y="1828800"/>
-            <a:ext cx="10972800" cy="4572000"/>
-          </a:xfrm>
-          <a:prstGeom prst="rect">
-            <a:avLst/>
-          </a:prstGeom>
-          <a:noFill/>
-        </p:spPr>
-        <p:txBody>
-          <a:bodyPr wrap="square">
-            <a:spAutoFit/>
-          </a:bodyPr>
-          <a:lstStyle/>
-          <a:p>
-            <a:pPr algn="l">
-              <a:lnSpc>
-                <a:spcPct val="140000"/>
-              </a:lnSpc>
-              <a:spcAft>
-                <a:spcPts val="800"/>
-              </a:spcAft>
-            </a:pPr>
-            <a:r>
-              <a:rPr sz="1600" b="1">
-                <a:solidFill>
-                  <a:srgbClr val="0369A1"/>
-                </a:solidFill>
-                <a:latin typeface="Calibri"/>
-              </a:rPr>
-              <a:t>● </a:t>
-            </a:r>
-            <a:r>
-              <a:rPr sz="1600">
-                <a:solidFill>
-                  <a:srgbClr val="0F2040"/>
-                </a:solidFill>
-                <a:latin typeface="Calibri"/>
-              </a:rPr>
-              <a:t>No puedes gestionar Usuarios (solo ver)</a:t>
-            </a:r>
-          </a:p>
-          <a:p>
-            <a:pPr algn="l">
-              <a:lnSpc>
-                <a:spcPct val="140000"/>
-              </a:lnSpc>
-              <a:spcAft>
-                <a:spcPts val="800"/>
-              </a:spcAft>
-            </a:pPr>
-            <a:r>
-              <a:rPr sz="1600" b="1">
-                <a:solidFill>
-                  <a:srgbClr val="0369A1"/>
-                </a:solidFill>
-                <a:latin typeface="Calibri"/>
-              </a:rPr>
-              <a:t>● </a:t>
-            </a:r>
-            <a:r>
-              <a:rPr sz="1600">
-                <a:solidFill>
-                  <a:srgbClr val="0F2040"/>
-                </a:solidFill>
-                <a:latin typeface="Calibri"/>
-              </a:rPr>
-              <a:t>No puedes eliminar nada (OT, proyectos, personal, etc.)</a:t>
-            </a:r>
-          </a:p>
-          <a:p>
-            <a:pPr algn="l">
-              <a:lnSpc>
-                <a:spcPct val="140000"/>
-              </a:lnSpc>
-              <a:spcAft>
-                <a:spcPts val="800"/>
-              </a:spcAft>
-            </a:pPr>
-            <a:r>
-              <a:rPr sz="1600" b="1">
-                <a:solidFill>
-                  <a:srgbClr val="0369A1"/>
-                </a:solidFill>
-                <a:latin typeface="Calibri"/>
-              </a:rPr>
-              <a:t>● </a:t>
-            </a:r>
-            <a:r>
-              <a:rPr sz="1600">
-                <a:solidFill>
-                  <a:srgbClr val="0F2040"/>
-                </a:solidFill>
-                <a:latin typeface="Calibri"/>
-              </a:rPr>
-              <a:t>No puedes crear proyectos (solo editar existentes)</a:t>
-            </a:r>
-          </a:p>
-          <a:p>
-            <a:pPr algn="l">
-              <a:lnSpc>
-                <a:spcPct val="140000"/>
-              </a:lnSpc>
-              <a:spcAft>
-                <a:spcPts val="800"/>
-              </a:spcAft>
-            </a:pPr>
-            <a:r>
-              <a:rPr sz="1600" b="1">
-                <a:solidFill>
-                  <a:srgbClr val="0369A1"/>
-                </a:solidFill>
-                <a:latin typeface="Calibri"/>
-              </a:rPr>
-              <a:t>● </a:t>
-            </a:r>
-            <a:r>
-              <a:rPr sz="1600">
-                <a:solidFill>
-                  <a:srgbClr val="0F2040"/>
-                </a:solidFill>
-                <a:latin typeface="Calibri"/>
-              </a:rPr>
-              <a:t>No puedes crear/eliminar personal (solo editar)</a:t>
-            </a:r>
-          </a:p>
-          <a:p>
-            <a:pPr algn="l">
-              <a:lnSpc>
-                <a:spcPct val="140000"/>
-              </a:lnSpc>
-              <a:spcAft>
-                <a:spcPts val="800"/>
-              </a:spcAft>
-            </a:pPr>
-            <a:r>
-              <a:rPr sz="1600" b="1">
-                <a:solidFill>
-                  <a:srgbClr val="0369A1"/>
-                </a:solidFill>
-                <a:latin typeface="Calibri"/>
-              </a:rPr>
-              <a:t>● </a:t>
-            </a:r>
-            <a:r>
-              <a:rPr sz="1600">
-                <a:solidFill>
-                  <a:srgbClr val="0F2040"/>
-                </a:solidFill>
-                <a:latin typeface="Calibri"/>
-              </a:rPr>
-              <a:t>No puedes gestionar Respaldos de BD</a:t>
-            </a:r>
-          </a:p>
-          <a:p>
-            <a:pPr algn="l">
-              <a:lnSpc>
-                <a:spcPct val="140000"/>
-              </a:lnSpc>
-              <a:spcAft>
-                <a:spcPts val="800"/>
-              </a:spcAft>
-            </a:pPr>
-            <a:r>
-              <a:rPr sz="1600" b="1">
-                <a:solidFill>
-                  <a:srgbClr val="0369A1"/>
-                </a:solidFill>
-                <a:latin typeface="Calibri"/>
-              </a:rPr>
-              <a:t>● </a:t>
-            </a:r>
-            <a:r>
-              <a:rPr sz="1600">
-                <a:solidFill>
-                  <a:srgbClr val="0F2040"/>
-                </a:solidFill>
-                <a:latin typeface="Calibri"/>
-              </a:rPr>
-              <a:t>No puedes ver Cumplimiento Legal</a:t>
-            </a:r>
-          </a:p>
-          <a:p>
-            <a:pPr algn="l">
-              <a:lnSpc>
-                <a:spcPct val="140000"/>
-              </a:lnSpc>
-              <a:spcAft>
-                <a:spcPts val="800"/>
-              </a:spcAft>
-            </a:pPr>
-            <a:r>
-              <a:rPr sz="1600" b="1">
-                <a:solidFill>
-                  <a:srgbClr val="0369A1"/>
-                </a:solidFill>
-                <a:latin typeface="Calibri"/>
-              </a:rPr>
-              <a:t>● </a:t>
-            </a:r>
-            <a:r>
-              <a:rPr sz="1600">
-                <a:solidFill>
-                  <a:srgbClr val="0F2040"/>
-                </a:solidFill>
-                <a:latin typeface="Calibri"/>
-              </a:rPr>
-              <a:t>No puedes ver Auditoría (logs)</a:t>
-            </a:r>
-          </a:p>
-          <a:p>
-            <a:pPr algn="l">
-              <a:lnSpc>
-                <a:spcPct val="140000"/>
-              </a:lnSpc>
-              <a:spcAft>
-                <a:spcPts val="800"/>
-              </a:spcAft>
-            </a:pPr>
-            <a:r>
-              <a:rPr sz="1600" b="1">
-                <a:solidFill>
-                  <a:srgbClr val="0369A1"/>
-                </a:solidFill>
-                <a:latin typeface="Calibri"/>
-              </a:rPr>
-              <a:t>● </a:t>
-            </a:r>
-            <a:r>
-              <a:rPr sz="1600">
-                <a:solidFill>
-                  <a:srgbClr val="0F2040"/>
-                </a:solidFill>
-                <a:latin typeface="Calibri"/>
-              </a:rPr>
-              <a:t>No puedes gestionar permisos del sistema</a:t>
-            </a:r>
-          </a:p>
-          <a:p>
-            <a:pPr algn="l">
-              <a:lnSpc>
-                <a:spcPct val="140000"/>
-              </a:lnSpc>
-              <a:spcAft>
-                <a:spcPts val="800"/>
-              </a:spcAft>
-            </a:pPr>
-            <a:r>
-              <a:rPr sz="1600" b="1">
-                <a:solidFill>
-                  <a:srgbClr val="0369A1"/>
-                </a:solidFill>
-                <a:latin typeface="Calibri"/>
-              </a:rPr>
-              <a:t>● </a:t>
-            </a:r>
-            <a:r>
-              <a:rPr sz="1600">
-                <a:solidFill>
-                  <a:srgbClr val="0F2040"/>
-                </a:solidFill>
-                <a:latin typeface="Calibri"/>
-              </a:rPr>
-              <a:t>No puedes aprobar SC en etapa 2 (eso lo hace el admin)</a:t>
+              <a:t>Proyectos — el supervisor puede ver y editar (no crear)</a:t>
             </a:r>
           </a:p>
         </p:txBody>
